--- a/docs/낙상예측_v5_발표자료.pptx
+++ b/docs/낙상예측_v5_발표자료.pptx
@@ -4,6 +4,9 @@
   <p:sldMasterIdLst>
     <p:sldMasterId id="2147483648" r:id="rId1"/>
   </p:sldMasterIdLst>
+  <p:notesMasterIdLst>
+    <p:notesMasterId r:id="rId12"/>
+  </p:notesMasterIdLst>
   <p:sldIdLst>
     <p:sldId id="256" r:id="rId2"/>
     <p:sldId id="257" r:id="rId3"/>
@@ -16,9 +19,6 @@
     <p:sldId id="264" r:id="rId10"/>
     <p:sldId id="265" r:id="rId11"/>
   </p:sldIdLst>
-  <p:notesMasterIdLst>
-    <p:notesMasterId r:id="rId12"/>
-  </p:notesMasterIdLst>
   <p:sldSz cx="12192000" cy="6858000"/>
   <p:notesSz cx="6858000" cy="12192000"/>
   <p:defaultTextStyle>
@@ -113,13 +113,20 @@
       </a:defRPr>
     </a:lvl9pPr>
   </p:defaultTextStyle>
+  <p:extLst>
+    <p:ext uri="{EFAFB233-063F-42B5-8137-9DF3F51BA10A}">
+      <p15:sldGuideLst xmlns:p15="http://schemas.microsoft.com/office/powerpoint/2012/main"/>
+    </p:ext>
+  </p:extLst>
 </p:presentation>
 </file>
 
 <file path=ppt/charts/chart1.xml><?xml version="1.0" encoding="utf-8"?>
-<c:chartSpace xmlns:c="http://schemas.openxmlformats.org/drawingml/2006/chart" xmlns:a="http://schemas.openxmlformats.org/drawingml/2006/main" xmlns:r="http://schemas.openxmlformats.org/officeDocument/2006/relationships">
+<c:chartSpace xmlns:c="http://schemas.openxmlformats.org/drawingml/2006/chart" xmlns:a="http://schemas.openxmlformats.org/drawingml/2006/main" xmlns:r="http://schemas.openxmlformats.org/officeDocument/2006/relationships" xmlns:c16r2="http://schemas.microsoft.com/office/drawing/2015/06/chart">
   <c:date1904 val="0"/>
+  <c:lang val="ko-KR"/>
   <c:roundedCorners val="1"/>
+  <c:style val="2"/>
   <c:chart>
     <c:autoTitleDeleted val="1"/>
     <c:plotArea>
@@ -149,30 +156,6 @@
             <a:effectLst/>
           </c:spPr>
           <c:invertIfNegative val="0"/>
-          <c:dLbls>
-            <c:numFmt formatCode="0.00" sourceLinked="0"/>
-            <c:txPr>
-              <a:bodyPr/>
-              <a:lstStyle/>
-              <a:p>
-                <a:pPr>
-                  <a:defRPr b="0" i="0" strike="noStrike" sz="1200" u="none">
-                    <a:solidFill>
-                      <a:srgbClr val="1C2B33"/>
-                    </a:solidFill>
-                    <a:latin typeface="Arial"/>
-                  </a:defRPr>
-                </a:pPr>
-              </a:p>
-            </c:txPr>
-            <c:showLegendKey val="0"/>
-            <c:showVal val="1"/>
-            <c:showCatName val="0"/>
-            <c:showSerName val="0"/>
-            <c:showPercent val="0"/>
-            <c:showBubbleSize val="0"/>
-            <c:showLeaderLines val="0"/>
-          </c:dLbls>
           <c:dPt>
             <c:idx val="0"/>
             <c:invertIfNegative val="0"/>
@@ -183,6 +166,11 @@
               </a:solidFill>
               <a:effectLst/>
             </c:spPr>
+            <c:extLst>
+              <c:ext xmlns:c16="http://schemas.microsoft.com/office/drawing/2014/chart" uri="{C3380CC4-5D6E-409C-BE32-E72D297353CC}">
+                <c16:uniqueId val="{00000001-2833-524B-A665-F3DDE8A9A3A9}"/>
+              </c:ext>
+            </c:extLst>
           </c:dPt>
           <c:dPt>
             <c:idx val="1"/>
@@ -194,6 +182,11 @@
               </a:solidFill>
               <a:effectLst/>
             </c:spPr>
+            <c:extLst>
+              <c:ext xmlns:c16="http://schemas.microsoft.com/office/drawing/2014/chart" uri="{C3380CC4-5D6E-409C-BE32-E72D297353CC}">
+                <c16:uniqueId val="{00000003-2833-524B-A665-F3DDE8A9A3A9}"/>
+              </c:ext>
+            </c:extLst>
           </c:dPt>
           <c:dPt>
             <c:idx val="2"/>
@@ -205,6 +198,11 @@
               </a:solidFill>
               <a:effectLst/>
             </c:spPr>
+            <c:extLst>
+              <c:ext xmlns:c16="http://schemas.microsoft.com/office/drawing/2014/chart" uri="{C3380CC4-5D6E-409C-BE32-E72D297353CC}">
+                <c16:uniqueId val="{00000005-2833-524B-A665-F3DDE8A9A3A9}"/>
+              </c:ext>
+            </c:extLst>
           </c:dPt>
           <c:dPt>
             <c:idx val="3"/>
@@ -216,28 +214,68 @@
               </a:solidFill>
               <a:effectLst/>
             </c:spPr>
+            <c:extLst>
+              <c:ext xmlns:c16="http://schemas.microsoft.com/office/drawing/2014/chart" uri="{C3380CC4-5D6E-409C-BE32-E72D297353CC}">
+                <c16:uniqueId val="{00000007-2833-524B-A665-F3DDE8A9A3A9}"/>
+              </c:ext>
+            </c:extLst>
           </c:dPt>
+          <c:dLbls>
+            <c:numFmt formatCode="0.00" sourceLinked="0"/>
+            <c:spPr>
+              <a:noFill/>
+              <a:ln>
+                <a:noFill/>
+              </a:ln>
+              <a:effectLst/>
+            </c:spPr>
+            <c:txPr>
+              <a:bodyPr/>
+              <a:lstStyle/>
+              <a:p>
+                <a:pPr>
+                  <a:defRPr sz="1200" b="0" i="0" u="none" strike="noStrike">
+                    <a:solidFill>
+                      <a:srgbClr val="1C2B33"/>
+                    </a:solidFill>
+                    <a:latin typeface="Arial"/>
+                  </a:defRPr>
+                </a:pPr>
+                <a:endParaRPr lang="ko-KR"/>
+              </a:p>
+            </c:txPr>
+            <c:showLegendKey val="0"/>
+            <c:showVal val="1"/>
+            <c:showCatName val="0"/>
+            <c:showSerName val="0"/>
+            <c:showPercent val="0"/>
+            <c:showBubbleSize val="0"/>
+            <c:showLeaderLines val="0"/>
+            <c:extLst>
+              <c:ext xmlns:c15="http://schemas.microsoft.com/office/drawing/2012/chart" uri="{CE6537A1-D6FC-4f65-9D91-7224C49458BB}">
+                <c15:showLeaderLines val="0"/>
+              </c:ext>
+            </c:extLst>
+          </c:dLbls>
           <c:cat>
-            <c:multiLvlStrRef>
+            <c:strRef>
               <c:f>Sheet1!$A$2:$A$5</c:f>
-              <c:multiLvlStrCache>
+              <c:strCache>
                 <c:ptCount val="4"/>
-                <c:lvl>
-                  <c:pt idx="0">
-                    <c:v>v1 시작점</c:v>
-                  </c:pt>
-                  <c:pt idx="1">
-                    <c:v>v2 시간특징</c:v>
-                  </c:pt>
-                  <c:pt idx="2">
-                    <c:v>v4 3D특징</c:v>
-                  </c:pt>
-                  <c:pt idx="3">
-                    <c:v>v5 도메인적응</c:v>
-                  </c:pt>
-                </c:lvl>
-              </c:multiLvlStrCache>
-            </c:multiLvlStrRef>
+                <c:pt idx="0">
+                  <c:v>v1 시작점</c:v>
+                </c:pt>
+                <c:pt idx="1">
+                  <c:v>v2 시간특징</c:v>
+                </c:pt>
+                <c:pt idx="2">
+                  <c:v>v4 3D특징</c:v>
+                </c:pt>
+                <c:pt idx="3">
+                  <c:v>v5 도메인적응</c:v>
+                </c:pt>
+              </c:strCache>
+            </c:strRef>
           </c:cat>
           <c:val>
             <c:numRef>
@@ -260,36 +298,23 @@
               </c:numCache>
             </c:numRef>
           </c:val>
+          <c:extLst>
+            <c:ext xmlns:c16="http://schemas.microsoft.com/office/drawing/2014/chart" uri="{C3380CC4-5D6E-409C-BE32-E72D297353CC}">
+              <c16:uniqueId val="{00000008-2833-524B-A665-F3DDE8A9A3A9}"/>
+            </c:ext>
+          </c:extLst>
         </c:ser>
         <c:dLbls>
-          <c:numFmt formatCode="0.00" sourceLinked="0"/>
-          <c:txPr>
-            <a:bodyPr/>
-            <a:lstStyle/>
-            <a:p>
-              <a:pPr>
-                <a:defRPr b="0" i="0" strike="noStrike" sz="1200" u="none">
-                  <a:solidFill>
-                    <a:srgbClr val="1C2B33"/>
-                  </a:solidFill>
-                  <a:latin typeface="Arial"/>
-                </a:defRPr>
-              </a:pPr>
-            </a:p>
-          </c:txPr>
           <c:showLegendKey val="0"/>
           <c:showVal val="1"/>
           <c:showCatName val="0"/>
           <c:showSerName val="0"/>
           <c:showPercent val="0"/>
           <c:showBubbleSize val="0"/>
-          <c:showLeaderLines val="0"/>
         </c:dLbls>
         <c:gapWidth val="60"/>
-        <c:overlap val="0"/>
         <c:axId val="2094734554"/>
         <c:axId val="2094734552"/>
-        <c:axId val="2094734556"/>
       </c:barChart>
       <c:catAx>
         <c:axId val="2094734554"/>
@@ -330,6 +355,7 @@
         <c:crosses val="autoZero"/>
         <c:auto val="1"/>
         <c:lblAlgn val="ctr"/>
+        <c:lblOffset val="100"/>
         <c:noMultiLvlLbl val="1"/>
       </c:catAx>
       <c:valAx>
@@ -393,6 +419,7 @@
     </c:plotArea>
     <c:plotVisOnly val="1"/>
     <c:dispBlanksAs val="span"/>
+    <c:showDLblsOverMax val="1"/>
   </c:chart>
   <c:spPr>
     <a:noFill/>
@@ -429,240 +456,16 @@
           <a:chExt cx="0" cy="0"/>
         </a:xfrm>
       </p:grpSpPr>
-      <p:sp>
-        <p:nvSpPr>
-          <p:cNvPr id="2" name="Header Placeholder 1"/>
-          <p:cNvSpPr>
-            <a:spLocks noGrp="1"/>
-          </p:cNvSpPr>
-          <p:nvPr>
-            <p:ph type="hdr" sz="quarter"/>
-          </p:nvPr>
-        </p:nvSpPr>
-        <p:spPr>
-          <a:xfrm>
-            <a:off x="0" y="0"/>
-            <a:ext cx="2971800" cy="458788"/>
-          </a:xfrm>
-          <a:prstGeom prst="rect">
-            <a:avLst/>
-          </a:prstGeom>
-        </p:spPr>
-        <p:txBody>
-          <a:bodyPr vert="horz" lIns="91440" tIns="45720" rIns="91440" bIns="45720" rtlCol="0"/>
-          <a:lstStyle>
-            <a:lvl1pPr algn="l">
-              <a:defRPr sz="1200"/>
-            </a:lvl1pPr>
-          </a:lstStyle>
-          <a:p>
-            <a:endParaRPr lang="en-US"/>
-          </a:p>
-        </p:txBody>
-      </p:sp>
-      <p:sp>
-        <p:nvSpPr>
-          <p:cNvPr id="3" name="Date Placeholder 2"/>
-          <p:cNvSpPr>
-            <a:spLocks noGrp="1"/>
-          </p:cNvSpPr>
-          <p:nvPr>
-            <p:ph type="dt" idx="1"/>
-          </p:nvPr>
-        </p:nvSpPr>
-        <p:spPr>
-          <a:xfrm>
-            <a:off x="3884613" y="0"/>
-            <a:ext cx="2971800" cy="458788"/>
-          </a:xfrm>
-          <a:prstGeom prst="rect">
-            <a:avLst/>
-          </a:prstGeom>
-        </p:spPr>
-        <p:txBody>
-          <a:bodyPr vert="horz" lIns="91440" tIns="45720" rIns="91440" bIns="45720" rtlCol="0"/>
-          <a:lstStyle>
-            <a:lvl1pPr algn="r">
-              <a:defRPr sz="1200"/>
-            </a:lvl1pPr>
-          </a:lstStyle>
-          <a:p>
-            <a:fld id="{5282F153-3F37-0F45-9E97-73ACFA13230C}" type="datetimeFigureOut">
-              <a:rPr lang="en-US"/>
-              <a:t>7/23/19</a:t>
-            </a:fld>
-            <a:endParaRPr lang="en-US"/>
-          </a:p>
-        </p:txBody>
-      </p:sp>
-      <p:sp>
-        <p:nvSpPr>
-          <p:cNvPr id="4" name="Slide Image Placeholder 3"/>
-          <p:cNvSpPr>
-            <a:spLocks noGrp="1" noRot="1" noChangeAspect="1"/>
-          </p:cNvSpPr>
-          <p:nvPr>
-            <p:ph type="sldImg" idx="2"/>
-          </p:nvPr>
-        </p:nvSpPr>
-        <p:spPr>
-          <a:xfrm>
-            <a:off x="685800" y="1143000"/>
-            <a:ext cx="5486400" cy="3086100"/>
-          </a:xfrm>
-          <a:prstGeom prst="rect">
-            <a:avLst/>
-          </a:prstGeom>
-          <a:noFill/>
-          <a:ln w="12700">
-            <a:solidFill>
-              <a:prstClr val="black"/>
-            </a:solidFill>
-          </a:ln>
-        </p:spPr>
-        <p:txBody>
-          <a:bodyPr vert="horz" lIns="91440" tIns="45720" rIns="91440" bIns="45720" rtlCol="0" anchor="ctr"/>
-          <a:lstStyle/>
-          <a:p>
-            <a:endParaRPr lang="en-US"/>
-          </a:p>
-        </p:txBody>
-      </p:sp>
-      <p:sp>
-        <p:nvSpPr>
-          <p:cNvPr id="5" name="Notes Placeholder 4"/>
-          <p:cNvSpPr>
-            <a:spLocks noGrp="1"/>
-          </p:cNvSpPr>
-          <p:nvPr>
-            <p:ph type="body" sz="quarter" idx="3"/>
-          </p:nvPr>
-        </p:nvSpPr>
-        <p:spPr>
-          <a:xfrm>
-            <a:off x="685800" y="4400550"/>
-            <a:ext cx="5486400" cy="3600450"/>
-          </a:xfrm>
-          <a:prstGeom prst="rect">
-            <a:avLst/>
-          </a:prstGeom>
-        </p:spPr>
-        <p:txBody>
-          <a:bodyPr vert="horz" lIns="91440" tIns="45720" rIns="91440" bIns="45720" rtlCol="0"/>
-          <a:lstStyle/>
-          <a:p>
-            <a:pPr lvl="0"/>
-            <a:r>
-              <a:rPr lang="en-US"/>
-              <a:t>Click to edit Master text styles</a:t>
-            </a:r>
-          </a:p>
-          <a:p>
-            <a:pPr lvl="1"/>
-            <a:r>
-              <a:rPr lang="en-US"/>
-              <a:t>Second level</a:t>
-            </a:r>
-          </a:p>
-          <a:p>
-            <a:pPr lvl="2"/>
-            <a:r>
-              <a:rPr lang="en-US"/>
-              <a:t>Third level</a:t>
-            </a:r>
-          </a:p>
-          <a:p>
-            <a:pPr lvl="3"/>
-            <a:r>
-              <a:rPr lang="en-US"/>
-              <a:t>Fourth level</a:t>
-            </a:r>
-          </a:p>
-          <a:p>
-            <a:pPr lvl="4"/>
-            <a:r>
-              <a:rPr lang="en-US"/>
-              <a:t>Fifth level</a:t>
-            </a:r>
-          </a:p>
-        </p:txBody>
-      </p:sp>
-      <p:sp>
-        <p:nvSpPr>
-          <p:cNvPr id="6" name="Footer Placeholder 5"/>
-          <p:cNvSpPr>
-            <a:spLocks noGrp="1"/>
-          </p:cNvSpPr>
-          <p:nvPr>
-            <p:ph type="ftr" sz="quarter" idx="4"/>
-          </p:nvPr>
-        </p:nvSpPr>
-        <p:spPr>
-          <a:xfrm>
-            <a:off x="0" y="8685213"/>
-            <a:ext cx="2971800" cy="458787"/>
-          </a:xfrm>
-          <a:prstGeom prst="rect">
-            <a:avLst/>
-          </a:prstGeom>
-        </p:spPr>
-        <p:txBody>
-          <a:bodyPr vert="horz" lIns="91440" tIns="45720" rIns="91440" bIns="45720" rtlCol="0" anchor="b"/>
-          <a:lstStyle>
-            <a:lvl1pPr algn="l">
-              <a:defRPr sz="1200"/>
-            </a:lvl1pPr>
-          </a:lstStyle>
-          <a:p>
-            <a:endParaRPr lang="en-US"/>
-          </a:p>
-        </p:txBody>
-      </p:sp>
-      <p:sp>
-        <p:nvSpPr>
-          <p:cNvPr id="7" name="Slide Number Placeholder 6"/>
-          <p:cNvSpPr>
-            <a:spLocks noGrp="1"/>
-          </p:cNvSpPr>
-          <p:nvPr>
-            <p:ph type="sldNum" sz="quarter" idx="5"/>
-          </p:nvPr>
-        </p:nvSpPr>
-        <p:spPr>
-          <a:xfrm>
-            <a:off x="3884613" y="8685213"/>
-            <a:ext cx="2971800" cy="458787"/>
-          </a:xfrm>
-          <a:prstGeom prst="rect">
-            <a:avLst/>
-          </a:prstGeom>
-        </p:spPr>
-        <p:txBody>
-          <a:bodyPr vert="horz" lIns="91440" tIns="45720" rIns="91440" bIns="45720" rtlCol="0" anchor="b"/>
-          <a:lstStyle>
-            <a:lvl1pPr algn="r">
-              <a:defRPr sz="1200"/>
-            </a:lvl1pPr>
-          </a:lstStyle>
-          <a:p>
-            <a:fld id="{CE5E9CC1-C706-0F49-92D6-E571CC5EEA8F}" type="slidenum">
-              <a:rPr lang="en-US"/>
-              <a:t>‹#›</a:t>
-            </a:fld>
-            <a:endParaRPr lang="en-US"/>
-          </a:p>
-        </p:txBody>
-      </p:sp>
     </p:spTree>
     <p:extLst>
       <p:ext uri="{BB962C8B-B14F-4D97-AF65-F5344CB8AC3E}">
-        <p14:creationId xmlns:p14="http://schemas.microsoft.com/office/powerpoint/2010/main" val="1024086991"/>
+        <p14:creationId xmlns:p14="http://schemas.microsoft.com/office/powerpoint/2010/main" val="3564073066"/>
       </p:ext>
     </p:extLst>
   </p:cSld>
   <p:clrMap bg1="lt1" tx1="dk1" bg2="lt2" tx2="dk2" accent1="accent1" accent2="accent2" accent3="accent3" accent4="accent4" accent5="accent5" accent6="accent6" hlink="hlink" folHlink="folHlink"/>
   <p:notesStyle>
-    <a:lvl1pPr marL="0" algn="l" defTabSz="914400" rtl="0" eaLnBrk="1" latinLnBrk="0" hangingPunct="1">
+    <a:lvl1pPr marL="0" algn="l" defTabSz="914400" rtl="0" eaLnBrk="1" latinLnBrk="1" hangingPunct="1">
       <a:defRPr sz="1200" kern="1200">
         <a:solidFill>
           <a:schemeClr val="tx1"/>
@@ -672,7 +475,7 @@
         <a:cs typeface="+mn-cs"/>
       </a:defRPr>
     </a:lvl1pPr>
-    <a:lvl2pPr marL="457200" algn="l" defTabSz="914400" rtl="0" eaLnBrk="1" latinLnBrk="0" hangingPunct="1">
+    <a:lvl2pPr marL="457200" algn="l" defTabSz="914400" rtl="0" eaLnBrk="1" latinLnBrk="1" hangingPunct="1">
       <a:defRPr sz="1200" kern="1200">
         <a:solidFill>
           <a:schemeClr val="tx1"/>
@@ -682,7 +485,7 @@
         <a:cs typeface="+mn-cs"/>
       </a:defRPr>
     </a:lvl2pPr>
-    <a:lvl3pPr marL="914400" algn="l" defTabSz="914400" rtl="0" eaLnBrk="1" latinLnBrk="0" hangingPunct="1">
+    <a:lvl3pPr marL="914400" algn="l" defTabSz="914400" rtl="0" eaLnBrk="1" latinLnBrk="1" hangingPunct="1">
       <a:defRPr sz="1200" kern="1200">
         <a:solidFill>
           <a:schemeClr val="tx1"/>
@@ -692,7 +495,7 @@
         <a:cs typeface="+mn-cs"/>
       </a:defRPr>
     </a:lvl3pPr>
-    <a:lvl4pPr marL="1371600" algn="l" defTabSz="914400" rtl="0" eaLnBrk="1" latinLnBrk="0" hangingPunct="1">
+    <a:lvl4pPr marL="1371600" algn="l" defTabSz="914400" rtl="0" eaLnBrk="1" latinLnBrk="1" hangingPunct="1">
       <a:defRPr sz="1200" kern="1200">
         <a:solidFill>
           <a:schemeClr val="tx1"/>
@@ -702,7 +505,7 @@
         <a:cs typeface="+mn-cs"/>
       </a:defRPr>
     </a:lvl4pPr>
-    <a:lvl5pPr marL="1828800" algn="l" defTabSz="914400" rtl="0" eaLnBrk="1" latinLnBrk="0" hangingPunct="1">
+    <a:lvl5pPr marL="1828800" algn="l" defTabSz="914400" rtl="0" eaLnBrk="1" latinLnBrk="1" hangingPunct="1">
       <a:defRPr sz="1200" kern="1200">
         <a:solidFill>
           <a:schemeClr val="tx1"/>
@@ -712,7 +515,7 @@
         <a:cs typeface="+mn-cs"/>
       </a:defRPr>
     </a:lvl5pPr>
-    <a:lvl6pPr marL="2286000" algn="l" defTabSz="914400" rtl="0" eaLnBrk="1" latinLnBrk="0" hangingPunct="1">
+    <a:lvl6pPr marL="2286000" algn="l" defTabSz="914400" rtl="0" eaLnBrk="1" latinLnBrk="1" hangingPunct="1">
       <a:defRPr sz="1200" kern="1200">
         <a:solidFill>
           <a:schemeClr val="tx1"/>
@@ -722,7 +525,7 @@
         <a:cs typeface="+mn-cs"/>
       </a:defRPr>
     </a:lvl6pPr>
-    <a:lvl7pPr marL="2743200" algn="l" defTabSz="914400" rtl="0" eaLnBrk="1" latinLnBrk="0" hangingPunct="1">
+    <a:lvl7pPr marL="2743200" algn="l" defTabSz="914400" rtl="0" eaLnBrk="1" latinLnBrk="1" hangingPunct="1">
       <a:defRPr sz="1200" kern="1200">
         <a:solidFill>
           <a:schemeClr val="tx1"/>
@@ -732,7 +535,7 @@
         <a:cs typeface="+mn-cs"/>
       </a:defRPr>
     </a:lvl7pPr>
-    <a:lvl8pPr marL="3200400" algn="l" defTabSz="914400" rtl="0" eaLnBrk="1" latinLnBrk="0" hangingPunct="1">
+    <a:lvl8pPr marL="3200400" algn="l" defTabSz="914400" rtl="0" eaLnBrk="1" latinLnBrk="1" hangingPunct="1">
       <a:defRPr sz="1200" kern="1200">
         <a:solidFill>
           <a:schemeClr val="tx1"/>
@@ -742,7 +545,7 @@
         <a:cs typeface="+mn-cs"/>
       </a:defRPr>
     </a:lvl8pPr>
-    <a:lvl9pPr marL="3657600" algn="l" defTabSz="914400" rtl="0" eaLnBrk="1" latinLnBrk="0" hangingPunct="1">
+    <a:lvl9pPr marL="3657600" algn="l" defTabSz="914400" rtl="0" eaLnBrk="1" latinLnBrk="1" hangingPunct="1">
       <a:defRPr sz="1200" kern="1200">
         <a:solidFill>
           <a:schemeClr val="tx1"/>
@@ -804,7 +607,6 @@
               <a:rPr lang="en-US" dirty="0"/>
               <a:t>단일 RGB 카메라로 낙상을 사전 예측하는 시스템. 사후 감지가 아니라 예측이 목표.</a:t>
             </a:r>
-            <a:endParaRPr lang="en-US" dirty="0"/>
           </a:p>
         </p:txBody>
       </p:sp>
@@ -889,8 +691,16 @@
           <a:lstStyle/>
           <a:p>
             <a:r>
-              <a:rPr lang="en-US" dirty="0"/>
-              <a:t/>
+              <a:rPr lang="ko-KR" altLang="en-US" dirty="0"/>
+              <a:t>기존에 있는 모델에 비해 어떻게 개선이 되어 있는지</a:t>
+            </a:r>
+            <a:r>
+              <a:rPr lang="en-US" altLang="ko-KR" dirty="0"/>
+              <a:t>.</a:t>
+            </a:r>
+            <a:r>
+              <a:rPr lang="ko-KR" altLang="en-US" dirty="0"/>
+              <a:t> </a:t>
             </a:r>
             <a:endParaRPr lang="en-US" dirty="0"/>
           </a:p>
@@ -976,10 +786,6 @@
           <a:bodyPr/>
           <a:lstStyle/>
           <a:p>
-            <a:r>
-              <a:rPr lang="en-US" dirty="0"/>
-              <a:t/>
-            </a:r>
             <a:endParaRPr lang="en-US" dirty="0"/>
           </a:p>
         </p:txBody>
@@ -1064,10 +870,6 @@
           <a:bodyPr/>
           <a:lstStyle/>
           <a:p>
-            <a:r>
-              <a:rPr lang="en-US" dirty="0"/>
-              <a:t/>
-            </a:r>
             <a:endParaRPr lang="en-US" dirty="0"/>
           </a:p>
         </p:txBody>
@@ -1152,10 +954,6 @@
           <a:bodyPr/>
           <a:lstStyle/>
           <a:p>
-            <a:r>
-              <a:rPr lang="en-US" dirty="0"/>
-              <a:t/>
-            </a:r>
             <a:endParaRPr lang="en-US" dirty="0"/>
           </a:p>
         </p:txBody>
@@ -1244,7 +1042,6 @@
               <a:rPr lang="en-US" dirty="0"/>
               <a:t>MCF는 라벨 노이즈 때문에 학습에서 제외하고 벤치마크로만 사용.</a:t>
             </a:r>
-            <a:endParaRPr lang="en-US" dirty="0"/>
           </a:p>
         </p:txBody>
       </p:sp>
@@ -1328,10 +1125,6 @@
           <a:bodyPr/>
           <a:lstStyle/>
           <a:p>
-            <a:r>
-              <a:rPr lang="en-US" dirty="0"/>
-              <a:t/>
-            </a:r>
             <a:endParaRPr lang="en-US" dirty="0"/>
           </a:p>
         </p:txBody>
@@ -1416,10 +1209,6 @@
           <a:bodyPr/>
           <a:lstStyle/>
           <a:p>
-            <a:r>
-              <a:rPr lang="en-US" dirty="0"/>
-              <a:t/>
-            </a:r>
             <a:endParaRPr lang="en-US" dirty="0"/>
           </a:p>
         </p:txBody>
@@ -1504,10 +1293,6 @@
           <a:bodyPr/>
           <a:lstStyle/>
           <a:p>
-            <a:r>
-              <a:rPr lang="en-US" dirty="0"/>
-              <a:t/>
-            </a:r>
             <a:endParaRPr lang="en-US" dirty="0"/>
           </a:p>
         </p:txBody>
@@ -1592,10 +1377,6 @@
           <a:bodyPr/>
           <a:lstStyle/>
           <a:p>
-            <a:r>
-              <a:rPr lang="en-US" dirty="0"/>
-              <a:t/>
-            </a:r>
             <a:endParaRPr lang="en-US" dirty="0"/>
           </a:p>
         </p:txBody>
@@ -1669,6 +1450,11 @@
 <file path=ppt/slideMasters/slideMaster1.xml><?xml version="1.0" encoding="utf-8"?>
 <p:sldMaster xmlns:a="http://schemas.openxmlformats.org/drawingml/2006/main" xmlns:r="http://schemas.openxmlformats.org/officeDocument/2006/relationships" xmlns:p="http://schemas.openxmlformats.org/presentationml/2006/main">
   <p:cSld>
+    <p:bg>
+      <p:bgRef idx="1001">
+        <a:schemeClr val="bg1"/>
+      </p:bgRef>
+    </p:bg>
     <p:spTree>
       <p:nvGrpSpPr>
         <p:cNvPr id="1" name=""/>
@@ -1951,6 +1737,7 @@
         <a:solidFill>
           <a:srgbClr val="013A45"/>
         </a:solidFill>
+        <a:effectLst/>
       </p:bgPr>
     </p:bg>
     <p:spTree>
@@ -1988,7 +1775,7 @@
           <a:bodyPr wrap="square" lIns="0" tIns="0" rIns="0" bIns="0" rtlCol="0" anchor="ctr"/>
           <a:lstStyle/>
           <a:p>
-            <a:pPr indent="0" marL="0">
+            <a:pPr marL="0" indent="0">
               <a:buNone/>
             </a:pPr>
             <a:r>
@@ -2027,7 +1814,7 @@
           <a:bodyPr wrap="square" lIns="0" tIns="0" rIns="0" bIns="0" rtlCol="0" anchor="ctr"/>
           <a:lstStyle/>
           <a:p>
-            <a:pPr indent="0" marL="0">
+            <a:pPr marL="0" indent="0">
               <a:buNone/>
             </a:pPr>
             <a:r>
@@ -2066,7 +1853,7 @@
           <a:bodyPr wrap="square" lIns="0" tIns="0" rIns="0" bIns="0" rtlCol="0" anchor="ctr"/>
           <a:lstStyle/>
           <a:p>
-            <a:pPr indent="0" marL="0">
+            <a:pPr marL="0" indent="0">
               <a:buNone/>
             </a:pPr>
             <a:r>
@@ -2105,7 +1892,7 @@
           <a:bodyPr wrap="square" lIns="0" tIns="0" rIns="0" bIns="0" rtlCol="0" anchor="ctr"/>
           <a:lstStyle/>
           <a:p>
-            <a:pPr indent="0" marL="0">
+            <a:pPr marL="0" indent="0">
               <a:buNone/>
             </a:pPr>
             <a:r>
@@ -2144,7 +1931,7 @@
           <a:bodyPr wrap="square" lIns="0" tIns="0" rIns="0" bIns="0" rtlCol="0" anchor="ctr"/>
           <a:lstStyle/>
           <a:p>
-            <a:pPr indent="0" marL="0">
+            <a:pPr marL="0" indent="0">
               <a:buNone/>
             </a:pPr>
             <a:r>
@@ -2183,7 +1970,7 @@
           <a:bodyPr wrap="square" lIns="0" tIns="0" rIns="0" bIns="0" rtlCol="0" anchor="ctr"/>
           <a:lstStyle/>
           <a:p>
-            <a:pPr indent="0" marL="0">
+            <a:pPr marL="0" indent="0">
               <a:buNone/>
             </a:pPr>
             <a:r>
@@ -2222,7 +2009,7 @@
           <a:bodyPr wrap="square" lIns="0" tIns="0" rIns="0" bIns="0" rtlCol="0" anchor="ctr"/>
           <a:lstStyle/>
           <a:p>
-            <a:pPr indent="0" marL="0">
+            <a:pPr marL="0" indent="0">
               <a:buNone/>
             </a:pPr>
             <a:r>
@@ -2261,7 +2048,7 @@
           <a:bodyPr wrap="square" lIns="0" tIns="0" rIns="0" bIns="0" rtlCol="0" anchor="ctr"/>
           <a:lstStyle/>
           <a:p>
-            <a:pPr indent="0" marL="0">
+            <a:pPr marL="0" indent="0">
               <a:buNone/>
             </a:pPr>
             <a:r>
@@ -2300,7 +2087,7 @@
           <a:bodyPr wrap="square" lIns="0" tIns="0" rIns="0" bIns="0" rtlCol="0" anchor="ctr"/>
           <a:lstStyle/>
           <a:p>
-            <a:pPr indent="0" marL="0">
+            <a:pPr marL="0" indent="0">
               <a:buNone/>
             </a:pPr>
             <a:r>
@@ -2339,7 +2126,7 @@
           <a:bodyPr wrap="square" lIns="0" tIns="0" rIns="0" bIns="0" rtlCol="0" anchor="ctr"/>
           <a:lstStyle/>
           <a:p>
-            <a:pPr indent="0" marL="0">
+            <a:pPr marL="0" indent="0">
               <a:buNone/>
             </a:pPr>
             <a:r>
@@ -2378,7 +2165,7 @@
           <a:bodyPr wrap="square" lIns="0" tIns="0" rIns="0" bIns="0" rtlCol="0" anchor="ctr"/>
           <a:lstStyle/>
           <a:p>
-            <a:pPr indent="0" marL="0">
+            <a:pPr marL="0" indent="0">
               <a:buNone/>
             </a:pPr>
             <a:r>
@@ -2412,6 +2199,7 @@
         <a:solidFill>
           <a:srgbClr val="013A45"/>
         </a:solidFill>
+        <a:effectLst/>
       </p:bgPr>
     </p:bg>
     <p:spTree>
@@ -2449,7 +2237,7 @@
           <a:bodyPr wrap="square" lIns="0" tIns="0" rIns="0" bIns="0" rtlCol="0" anchor="ctr"/>
           <a:lstStyle/>
           <a:p>
-            <a:pPr indent="0" marL="0">
+            <a:pPr marL="0" indent="0">
               <a:buNone/>
             </a:pPr>
             <a:r>
@@ -2488,7 +2276,7 @@
           <a:bodyPr wrap="square" lIns="0" tIns="0" rIns="0" bIns="0" rtlCol="0" anchor="ctr"/>
           <a:lstStyle/>
           <a:p>
-            <a:pPr indent="0" marL="0">
+            <a:pPr marL="0" indent="0">
               <a:lnSpc>
                 <a:spcPts val="4000"/>
               </a:lnSpc>
@@ -2508,7 +2296,7 @@
             <a:endParaRPr lang="en-US" sz="2600" dirty="0"/>
           </a:p>
           <a:p>
-            <a:pPr indent="0" marL="0">
+            <a:pPr marL="0" indent="0">
               <a:lnSpc>
                 <a:spcPts val="4000"/>
               </a:lnSpc>
@@ -2528,7 +2316,7 @@
             <a:endParaRPr lang="en-US" sz="2600" dirty="0"/>
           </a:p>
           <a:p>
-            <a:pPr indent="0" marL="0">
+            <a:pPr marL="0" indent="0">
               <a:lnSpc>
                 <a:spcPts val="4000"/>
               </a:lnSpc>
@@ -2570,7 +2358,7 @@
           <a:bodyPr wrap="square" lIns="0" tIns="0" rIns="0" bIns="0" rtlCol="0" anchor="ctr"/>
           <a:lstStyle/>
           <a:p>
-            <a:pPr indent="0" marL="0">
+            <a:pPr marL="0" indent="0">
               <a:buNone/>
             </a:pPr>
             <a:r>
@@ -2719,7 +2507,7 @@
           <a:bodyPr wrap="square" lIns="0" tIns="0" rIns="0" bIns="0" rtlCol="0" anchor="ctr"/>
           <a:lstStyle/>
           <a:p>
-            <a:pPr indent="0" marL="0">
+            <a:pPr marL="0" indent="0">
               <a:buNone/>
             </a:pPr>
             <a:r>
@@ -2758,7 +2546,7 @@
           <a:bodyPr wrap="square" lIns="0" tIns="0" rIns="0" bIns="0" rtlCol="0" anchor="ctr"/>
           <a:lstStyle/>
           <a:p>
-            <a:pPr indent="0" marL="0">
+            <a:pPr marL="0" indent="0">
               <a:buNone/>
             </a:pPr>
             <a:r>
@@ -2802,6 +2590,13 @@
             <a:prstDash val="solid"/>
           </a:ln>
         </p:spPr>
+        <p:txBody>
+          <a:bodyPr/>
+          <a:lstStyle/>
+          <a:p>
+            <a:endParaRPr lang="ko-KR" altLang="en-US"/>
+          </a:p>
+        </p:txBody>
       </p:sp>
       <p:sp>
         <p:nvSpPr>
@@ -2824,7 +2619,7 @@
           <a:bodyPr wrap="square" lIns="0" tIns="0" rIns="0" bIns="0" rtlCol="0" anchor="ctr"/>
           <a:lstStyle/>
           <a:p>
-            <a:pPr indent="0" marL="0">
+            <a:pPr marL="0" indent="0">
               <a:buNone/>
             </a:pPr>
             <a:r>
@@ -2953,6 +2748,13 @@
             <a:prstDash val="solid"/>
           </a:ln>
         </p:spPr>
+        <p:txBody>
+          <a:bodyPr/>
+          <a:lstStyle/>
+          <a:p>
+            <a:endParaRPr lang="ko-KR" altLang="en-US"/>
+          </a:p>
+        </p:txBody>
       </p:sp>
       <p:sp>
         <p:nvSpPr>
@@ -2975,7 +2777,7 @@
           <a:bodyPr wrap="square" lIns="0" tIns="0" rIns="0" bIns="0" rtlCol="0" anchor="ctr"/>
           <a:lstStyle/>
           <a:p>
-            <a:pPr indent="0" marL="0">
+            <a:pPr marL="0" indent="0">
               <a:buNone/>
             </a:pPr>
             <a:r>
@@ -3104,6 +2906,13 @@
             <a:prstDash val="solid"/>
           </a:ln>
         </p:spPr>
+        <p:txBody>
+          <a:bodyPr/>
+          <a:lstStyle/>
+          <a:p>
+            <a:endParaRPr lang="ko-KR" altLang="en-US"/>
+          </a:p>
+        </p:txBody>
       </p:sp>
       <p:sp>
         <p:nvSpPr>
@@ -3126,7 +2935,7 @@
           <a:bodyPr wrap="square" lIns="0" tIns="0" rIns="0" bIns="0" rtlCol="0" anchor="ctr"/>
           <a:lstStyle/>
           <a:p>
-            <a:pPr indent="0" marL="0">
+            <a:pPr marL="0" indent="0">
               <a:buNone/>
             </a:pPr>
             <a:r>
@@ -3165,7 +2974,7 @@
           <a:bodyPr wrap="square" lIns="0" tIns="0" rIns="0" bIns="0" rtlCol="0" anchor="ctr"/>
           <a:lstStyle/>
           <a:p>
-            <a:pPr indent="0" marL="0">
+            <a:pPr marL="0" indent="0">
               <a:buNone/>
             </a:pPr>
             <a:r>
@@ -3229,7 +3038,7 @@
           <a:bodyPr wrap="square" lIns="0" tIns="0" rIns="0" bIns="0" rtlCol="0" anchor="ctr"/>
           <a:lstStyle/>
           <a:p>
-            <a:pPr indent="0" marL="0">
+            <a:pPr marL="0" indent="0">
               <a:buNone/>
             </a:pPr>
             <a:r>
@@ -3268,7 +3077,7 @@
           <a:bodyPr wrap="square" lIns="0" tIns="0" rIns="0" bIns="0" rtlCol="0" anchor="ctr"/>
           <a:lstStyle/>
           <a:p>
-            <a:pPr indent="0" marL="0">
+            <a:pPr marL="0" indent="0">
               <a:buNone/>
             </a:pPr>
             <a:r>
@@ -3302,19 +3111,55 @@
         </p:nvGraphicFramePr>
         <p:xfrm>
           <a:off x="640080" y="1691640"/>
-          <a:ext cx="10881360" cy="914400"/>
+          <a:ext cx="10881360" cy="2103120"/>
         </p:xfrm>
         <a:graphic>
           <a:graphicData uri="http://schemas.openxmlformats.org/drawingml/2006/table">
             <a:tbl>
               <a:tblPr/>
               <a:tblGrid>
-                <a:gridCol w="1554480"/>
-                <a:gridCol w="1828800"/>
-                <a:gridCol w="1737360"/>
-                <a:gridCol w="1280160"/>
-                <a:gridCol w="914400"/>
-                <a:gridCol w="3566160"/>
+                <a:gridCol w="1554480">
+                  <a:extLst>
+                    <a:ext uri="{9D8B030D-6E8A-4147-A177-3AD203B41FA5}">
+                      <a16:colId xmlns:a16="http://schemas.microsoft.com/office/drawing/2014/main" val="20000"/>
+                    </a:ext>
+                  </a:extLst>
+                </a:gridCol>
+                <a:gridCol w="1828800">
+                  <a:extLst>
+                    <a:ext uri="{9D8B030D-6E8A-4147-A177-3AD203B41FA5}">
+                      <a16:colId xmlns:a16="http://schemas.microsoft.com/office/drawing/2014/main" val="20001"/>
+                    </a:ext>
+                  </a:extLst>
+                </a:gridCol>
+                <a:gridCol w="1737360">
+                  <a:extLst>
+                    <a:ext uri="{9D8B030D-6E8A-4147-A177-3AD203B41FA5}">
+                      <a16:colId xmlns:a16="http://schemas.microsoft.com/office/drawing/2014/main" val="20002"/>
+                    </a:ext>
+                  </a:extLst>
+                </a:gridCol>
+                <a:gridCol w="1280160">
+                  <a:extLst>
+                    <a:ext uri="{9D8B030D-6E8A-4147-A177-3AD203B41FA5}">
+                      <a16:colId xmlns:a16="http://schemas.microsoft.com/office/drawing/2014/main" val="20003"/>
+                    </a:ext>
+                  </a:extLst>
+                </a:gridCol>
+                <a:gridCol w="914400">
+                  <a:extLst>
+                    <a:ext uri="{9D8B030D-6E8A-4147-A177-3AD203B41FA5}">
+                      <a16:colId xmlns:a16="http://schemas.microsoft.com/office/drawing/2014/main" val="20004"/>
+                    </a:ext>
+                  </a:extLst>
+                </a:gridCol>
+                <a:gridCol w="3566160">
+                  <a:extLst>
+                    <a:ext uri="{9D8B030D-6E8A-4147-A177-3AD203B41FA5}">
+                      <a16:colId xmlns:a16="http://schemas.microsoft.com/office/drawing/2014/main" val="20005"/>
+                    </a:ext>
+                  </a:extLst>
+                </a:gridCol>
               </a:tblGrid>
               <a:tr h="420624">
                 <a:tc>
@@ -3322,7 +3167,7 @@
                     <a:bodyPr/>
                     <a:lstStyle/>
                     <a:p>
-                      <a:pPr algn="l" indent="0" marL="0">
+                      <a:pPr marL="0" indent="0" algn="l">
                         <a:buNone/>
                       </a:pPr>
                       <a:r>
@@ -3390,7 +3235,7 @@
                     <a:bodyPr/>
                     <a:lstStyle/>
                     <a:p>
-                      <a:pPr algn="l" indent="0" marL="0">
+                      <a:pPr marL="0" indent="0" algn="l">
                         <a:buNone/>
                       </a:pPr>
                       <a:r>
@@ -3458,7 +3303,7 @@
                     <a:bodyPr/>
                     <a:lstStyle/>
                     <a:p>
-                      <a:pPr algn="l" indent="0" marL="0">
+                      <a:pPr marL="0" indent="0" algn="l">
                         <a:buNone/>
                       </a:pPr>
                       <a:r>
@@ -3526,7 +3371,7 @@
                     <a:bodyPr/>
                     <a:lstStyle/>
                     <a:p>
-                      <a:pPr algn="l" indent="0" marL="0">
+                      <a:pPr marL="0" indent="0" algn="l">
                         <a:buNone/>
                       </a:pPr>
                       <a:r>
@@ -3594,7 +3439,7 @@
                     <a:bodyPr/>
                     <a:lstStyle/>
                     <a:p>
-                      <a:pPr algn="l" indent="0" marL="0">
+                      <a:pPr marL="0" indent="0" algn="l">
                         <a:buNone/>
                       </a:pPr>
                       <a:r>
@@ -3662,7 +3507,7 @@
                     <a:bodyPr/>
                     <a:lstStyle/>
                     <a:p>
-                      <a:pPr algn="l" indent="0" marL="0">
+                      <a:pPr marL="0" indent="0" algn="l">
                         <a:buNone/>
                       </a:pPr>
                       <a:r>
@@ -3725,6 +3570,11 @@
                     </a:solidFill>
                   </a:tcPr>
                 </a:tc>
+                <a:extLst>
+                  <a:ext uri="{0D108BD9-81ED-4DB2-BD59-A6C34878D82A}">
+                    <a16:rowId xmlns:a16="http://schemas.microsoft.com/office/drawing/2014/main" val="10000"/>
+                  </a:ext>
+                </a:extLst>
               </a:tr>
               <a:tr h="420624">
                 <a:tc>
@@ -3732,7 +3582,7 @@
                     <a:bodyPr/>
                     <a:lstStyle/>
                     <a:p>
-                      <a:pPr algn="l" indent="0" marL="0">
+                      <a:pPr marL="0" indent="0" algn="l">
                         <a:buNone/>
                       </a:pPr>
                       <a:r>
@@ -3800,7 +3650,7 @@
                     <a:bodyPr/>
                     <a:lstStyle/>
                     <a:p>
-                      <a:pPr algn="l" indent="0" marL="0">
+                      <a:pPr marL="0" indent="0" algn="l">
                         <a:buNone/>
                       </a:pPr>
                       <a:r>
@@ -3868,7 +3718,7 @@
                     <a:bodyPr/>
                     <a:lstStyle/>
                     <a:p>
-                      <a:pPr algn="l" indent="0" marL="0">
+                      <a:pPr marL="0" indent="0" algn="l">
                         <a:buNone/>
                       </a:pPr>
                       <a:r>
@@ -3936,7 +3786,7 @@
                     <a:bodyPr/>
                     <a:lstStyle/>
                     <a:p>
-                      <a:pPr algn="l" indent="0" marL="0">
+                      <a:pPr marL="0" indent="0" algn="l">
                         <a:buNone/>
                       </a:pPr>
                       <a:r>
@@ -4004,7 +3854,7 @@
                     <a:bodyPr/>
                     <a:lstStyle/>
                     <a:p>
-                      <a:pPr algn="l" indent="0" marL="0">
+                      <a:pPr marL="0" indent="0" algn="l">
                         <a:buNone/>
                       </a:pPr>
                       <a:r>
@@ -4072,7 +3922,7 @@
                     <a:bodyPr/>
                     <a:lstStyle/>
                     <a:p>
-                      <a:pPr algn="l" indent="0" marL="0">
+                      <a:pPr marL="0" indent="0" algn="l">
                         <a:buNone/>
                       </a:pPr>
                       <a:r>
@@ -4135,6 +3985,11 @@
                     </a:solidFill>
                   </a:tcPr>
                 </a:tc>
+                <a:extLst>
+                  <a:ext uri="{0D108BD9-81ED-4DB2-BD59-A6C34878D82A}">
+                    <a16:rowId xmlns:a16="http://schemas.microsoft.com/office/drawing/2014/main" val="10001"/>
+                  </a:ext>
+                </a:extLst>
               </a:tr>
               <a:tr h="420624">
                 <a:tc>
@@ -4142,7 +3997,7 @@
                     <a:bodyPr/>
                     <a:lstStyle/>
                     <a:p>
-                      <a:pPr algn="l" indent="0" marL="0">
+                      <a:pPr marL="0" indent="0" algn="l">
                         <a:buNone/>
                       </a:pPr>
                       <a:r>
@@ -4210,7 +4065,7 @@
                     <a:bodyPr/>
                     <a:lstStyle/>
                     <a:p>
-                      <a:pPr algn="l" indent="0" marL="0">
+                      <a:pPr marL="0" indent="0" algn="l">
                         <a:buNone/>
                       </a:pPr>
                       <a:r>
@@ -4278,7 +4133,7 @@
                     <a:bodyPr/>
                     <a:lstStyle/>
                     <a:p>
-                      <a:pPr algn="l" indent="0" marL="0">
+                      <a:pPr marL="0" indent="0" algn="l">
                         <a:buNone/>
                       </a:pPr>
                       <a:r>
@@ -4346,7 +4201,7 @@
                     <a:bodyPr/>
                     <a:lstStyle/>
                     <a:p>
-                      <a:pPr algn="l" indent="0" marL="0">
+                      <a:pPr marL="0" indent="0" algn="l">
                         <a:buNone/>
                       </a:pPr>
                       <a:r>
@@ -4414,7 +4269,7 @@
                     <a:bodyPr/>
                     <a:lstStyle/>
                     <a:p>
-                      <a:pPr algn="l" indent="0" marL="0">
+                      <a:pPr marL="0" indent="0" algn="l">
                         <a:buNone/>
                       </a:pPr>
                       <a:r>
@@ -4482,7 +4337,7 @@
                     <a:bodyPr/>
                     <a:lstStyle/>
                     <a:p>
-                      <a:pPr algn="l" indent="0" marL="0">
+                      <a:pPr marL="0" indent="0" algn="l">
                         <a:buNone/>
                       </a:pPr>
                       <a:r>
@@ -4545,6 +4400,11 @@
                     </a:solidFill>
                   </a:tcPr>
                 </a:tc>
+                <a:extLst>
+                  <a:ext uri="{0D108BD9-81ED-4DB2-BD59-A6C34878D82A}">
+                    <a16:rowId xmlns:a16="http://schemas.microsoft.com/office/drawing/2014/main" val="10002"/>
+                  </a:ext>
+                </a:extLst>
               </a:tr>
               <a:tr h="420624">
                 <a:tc>
@@ -4552,7 +4412,7 @@
                     <a:bodyPr/>
                     <a:lstStyle/>
                     <a:p>
-                      <a:pPr algn="l" indent="0" marL="0">
+                      <a:pPr marL="0" indent="0" algn="l">
                         <a:buNone/>
                       </a:pPr>
                       <a:r>
@@ -4620,7 +4480,7 @@
                     <a:bodyPr/>
                     <a:lstStyle/>
                     <a:p>
-                      <a:pPr algn="l" indent="0" marL="0">
+                      <a:pPr marL="0" indent="0" algn="l">
                         <a:buNone/>
                       </a:pPr>
                       <a:r>
@@ -4688,7 +4548,7 @@
                     <a:bodyPr/>
                     <a:lstStyle/>
                     <a:p>
-                      <a:pPr algn="l" indent="0" marL="0">
+                      <a:pPr marL="0" indent="0" algn="l">
                         <a:buNone/>
                       </a:pPr>
                       <a:r>
@@ -4756,7 +4616,7 @@
                     <a:bodyPr/>
                     <a:lstStyle/>
                     <a:p>
-                      <a:pPr algn="l" indent="0" marL="0">
+                      <a:pPr marL="0" indent="0" algn="l">
                         <a:buNone/>
                       </a:pPr>
                       <a:r>
@@ -4824,7 +4684,7 @@
                     <a:bodyPr/>
                     <a:lstStyle/>
                     <a:p>
-                      <a:pPr algn="l" indent="0" marL="0">
+                      <a:pPr marL="0" indent="0" algn="l">
                         <a:buNone/>
                       </a:pPr>
                       <a:r>
@@ -4892,7 +4752,7 @@
                     <a:bodyPr/>
                     <a:lstStyle/>
                     <a:p>
-                      <a:pPr algn="l" indent="0" marL="0">
+                      <a:pPr marL="0" indent="0" algn="l">
                         <a:buNone/>
                       </a:pPr>
                       <a:r>
@@ -4955,6 +4815,11 @@
                     </a:solidFill>
                   </a:tcPr>
                 </a:tc>
+                <a:extLst>
+                  <a:ext uri="{0D108BD9-81ED-4DB2-BD59-A6C34878D82A}">
+                    <a16:rowId xmlns:a16="http://schemas.microsoft.com/office/drawing/2014/main" val="10003"/>
+                  </a:ext>
+                </a:extLst>
               </a:tr>
               <a:tr h="420624">
                 <a:tc>
@@ -4962,7 +4827,7 @@
                     <a:bodyPr/>
                     <a:lstStyle/>
                     <a:p>
-                      <a:pPr algn="l" indent="0" marL="0">
+                      <a:pPr marL="0" indent="0" algn="l">
                         <a:buNone/>
                       </a:pPr>
                       <a:r>
@@ -5030,7 +4895,7 @@
                     <a:bodyPr/>
                     <a:lstStyle/>
                     <a:p>
-                      <a:pPr algn="l" indent="0" marL="0">
+                      <a:pPr marL="0" indent="0" algn="l">
                         <a:buNone/>
                       </a:pPr>
                       <a:r>
@@ -5098,7 +4963,7 @@
                     <a:bodyPr/>
                     <a:lstStyle/>
                     <a:p>
-                      <a:pPr algn="l" indent="0" marL="0">
+                      <a:pPr marL="0" indent="0" algn="l">
                         <a:buNone/>
                       </a:pPr>
                       <a:r>
@@ -5166,7 +5031,7 @@
                     <a:bodyPr/>
                     <a:lstStyle/>
                     <a:p>
-                      <a:pPr algn="l" indent="0" marL="0">
+                      <a:pPr marL="0" indent="0" algn="l">
                         <a:buNone/>
                       </a:pPr>
                       <a:r>
@@ -5234,7 +5099,7 @@
                     <a:bodyPr/>
                     <a:lstStyle/>
                     <a:p>
-                      <a:pPr algn="l" indent="0" marL="0">
+                      <a:pPr marL="0" indent="0" algn="l">
                         <a:buNone/>
                       </a:pPr>
                       <a:r>
@@ -5302,7 +5167,7 @@
                     <a:bodyPr/>
                     <a:lstStyle/>
                     <a:p>
-                      <a:pPr algn="l" indent="0" marL="0">
+                      <a:pPr marL="0" indent="0" algn="l">
                         <a:buNone/>
                       </a:pPr>
                       <a:r>
@@ -5365,6 +5230,11 @@
                     </a:solidFill>
                   </a:tcPr>
                 </a:tc>
+                <a:extLst>
+                  <a:ext uri="{0D108BD9-81ED-4DB2-BD59-A6C34878D82A}">
+                    <a16:rowId xmlns:a16="http://schemas.microsoft.com/office/drawing/2014/main" val="10004"/>
+                  </a:ext>
+                </a:extLst>
               </a:tr>
             </a:tbl>
           </a:graphicData>
@@ -5396,6 +5266,13 @@
             <a:prstDash val="solid"/>
           </a:ln>
         </p:spPr>
+        <p:txBody>
+          <a:bodyPr/>
+          <a:lstStyle/>
+          <a:p>
+            <a:endParaRPr lang="ko-KR" altLang="en-US"/>
+          </a:p>
+        </p:txBody>
       </p:sp>
       <p:sp>
         <p:nvSpPr>
@@ -5418,7 +5295,7 @@
           <a:bodyPr wrap="square" lIns="0" tIns="0" rIns="0" bIns="0" rtlCol="0" anchor="ctr"/>
           <a:lstStyle/>
           <a:p>
-            <a:pPr indent="0" marL="0">
+            <a:pPr marL="0" indent="0">
               <a:buNone/>
             </a:pPr>
             <a:r>
@@ -5457,7 +5334,7 @@
           <a:bodyPr wrap="square" lIns="0" tIns="0" rIns="0" bIns="0" rtlCol="0" anchor="ctr"/>
           <a:lstStyle/>
           <a:p>
-            <a:pPr indent="0" marL="0">
+            <a:pPr marL="0" indent="0">
               <a:buNone/>
             </a:pPr>
             <a:r>
@@ -5496,7 +5373,7 @@
           <a:bodyPr wrap="square" lIns="0" tIns="0" rIns="0" bIns="0" rtlCol="0" anchor="ctr"/>
           <a:lstStyle/>
           <a:p>
-            <a:pPr indent="0" marL="0">
+            <a:pPr marL="0" indent="0">
               <a:buNone/>
             </a:pPr>
             <a:r>
@@ -5560,7 +5437,7 @@
           <a:bodyPr wrap="square" lIns="0" tIns="0" rIns="0" bIns="0" rtlCol="0" anchor="ctr"/>
           <a:lstStyle/>
           <a:p>
-            <a:pPr indent="0" marL="0">
+            <a:pPr marL="0" indent="0">
               <a:buNone/>
             </a:pPr>
             <a:r>
@@ -5599,7 +5476,7 @@
           <a:bodyPr wrap="square" lIns="0" tIns="0" rIns="0" bIns="0" rtlCol="0" anchor="ctr"/>
           <a:lstStyle/>
           <a:p>
-            <a:pPr indent="0" marL="0">
+            <a:pPr marL="0" indent="0">
               <a:buNone/>
             </a:pPr>
             <a:r>
@@ -5619,7 +5496,7 @@
       </p:sp>
       <p:graphicFrame>
         <p:nvGraphicFramePr>
-          <p:cNvPr id="4" name="Chart 0" descr=""/>
+          <p:cNvPr id="4" name="Chart 0"/>
           <p:cNvGraphicFramePr/>
           <p:nvPr/>
         </p:nvGraphicFramePr>
@@ -5627,9 +5504,9 @@
           <a:off x="640080" y="1737360"/>
           <a:ext cx="6035040" cy="3840480"/>
         </p:xfrm>
-        <a:graphic xmlns:a="http://schemas.openxmlformats.org/drawingml/2006/main">
+        <a:graphic>
           <a:graphicData uri="http://schemas.openxmlformats.org/drawingml/2006/chart">
-            <c:chart xmlns:c="http://schemas.openxmlformats.org/drawingml/2006/chart" r:id="rId1"/>
+            <c:chart xmlns:c="http://schemas.openxmlformats.org/drawingml/2006/chart" xmlns:r="http://schemas.openxmlformats.org/officeDocument/2006/relationships" r:id="rId3"/>
           </a:graphicData>
         </a:graphic>
       </p:graphicFrame>
@@ -5659,6 +5536,13 @@
             <a:prstDash val="solid"/>
           </a:ln>
         </p:spPr>
+        <p:txBody>
+          <a:bodyPr/>
+          <a:lstStyle/>
+          <a:p>
+            <a:endParaRPr lang="ko-KR" altLang="en-US"/>
+          </a:p>
+        </p:txBody>
       </p:sp>
       <p:sp>
         <p:nvSpPr>
@@ -5681,7 +5565,7 @@
           <a:bodyPr wrap="square" lIns="0" tIns="0" rIns="0" bIns="0" rtlCol="0" anchor="ctr"/>
           <a:lstStyle/>
           <a:p>
-            <a:pPr indent="0" marL="0">
+            <a:pPr marL="0" indent="0">
               <a:buNone/>
             </a:pPr>
             <a:r>
@@ -5720,7 +5604,7 @@
           <a:bodyPr wrap="square" lIns="0" tIns="0" rIns="0" bIns="0" rtlCol="0" anchor="ctr"/>
           <a:lstStyle/>
           <a:p>
-            <a:pPr indent="0" marL="0">
+            <a:pPr marL="0" indent="0">
               <a:buNone/>
             </a:pPr>
             <a:r>
@@ -5759,7 +5643,7 @@
           <a:bodyPr wrap="square" lIns="0" tIns="0" rIns="0" bIns="0" rtlCol="0" anchor="ctr"/>
           <a:lstStyle/>
           <a:p>
-            <a:pPr indent="0" marL="0">
+            <a:pPr marL="0" indent="0">
               <a:buNone/>
             </a:pPr>
             <a:r>
@@ -5803,6 +5687,13 @@
             <a:prstDash val="solid"/>
           </a:ln>
         </p:spPr>
+        <p:txBody>
+          <a:bodyPr/>
+          <a:lstStyle/>
+          <a:p>
+            <a:endParaRPr lang="ko-KR" altLang="en-US"/>
+          </a:p>
+        </p:txBody>
       </p:sp>
       <p:sp>
         <p:nvSpPr>
@@ -5825,7 +5716,7 @@
           <a:bodyPr wrap="square" lIns="0" tIns="0" rIns="0" bIns="0" rtlCol="0" anchor="ctr"/>
           <a:lstStyle/>
           <a:p>
-            <a:pPr indent="0" marL="0">
+            <a:pPr marL="0" indent="0">
               <a:buNone/>
             </a:pPr>
             <a:r>
@@ -5864,7 +5755,7 @@
           <a:bodyPr wrap="square" lIns="0" tIns="0" rIns="0" bIns="0" rtlCol="0" anchor="ctr"/>
           <a:lstStyle/>
           <a:p>
-            <a:pPr indent="0" marL="0">
+            <a:pPr marL="0" indent="0">
               <a:buNone/>
             </a:pPr>
             <a:r>
@@ -5903,7 +5794,7 @@
           <a:bodyPr wrap="square" lIns="0" tIns="0" rIns="0" bIns="0" rtlCol="0" anchor="ctr"/>
           <a:lstStyle/>
           <a:p>
-            <a:pPr indent="0" marL="0">
+            <a:pPr marL="0" indent="0">
               <a:buNone/>
             </a:pPr>
             <a:r>
@@ -5947,6 +5838,13 @@
             <a:prstDash val="solid"/>
           </a:ln>
         </p:spPr>
+        <p:txBody>
+          <a:bodyPr/>
+          <a:lstStyle/>
+          <a:p>
+            <a:endParaRPr lang="ko-KR" altLang="en-US"/>
+          </a:p>
+        </p:txBody>
       </p:sp>
       <p:sp>
         <p:nvSpPr>
@@ -5969,7 +5867,7 @@
           <a:bodyPr wrap="square" lIns="0" tIns="0" rIns="0" bIns="0" rtlCol="0" anchor="ctr"/>
           <a:lstStyle/>
           <a:p>
-            <a:pPr indent="0" marL="0">
+            <a:pPr marL="0" indent="0">
               <a:buNone/>
             </a:pPr>
             <a:r>
@@ -6008,7 +5906,7 @@
           <a:bodyPr wrap="square" lIns="0" tIns="0" rIns="0" bIns="0" rtlCol="0" anchor="ctr"/>
           <a:lstStyle/>
           <a:p>
-            <a:pPr indent="0" marL="0">
+            <a:pPr marL="0" indent="0">
               <a:buNone/>
             </a:pPr>
             <a:r>
@@ -6047,7 +5945,7 @@
           <a:bodyPr wrap="square" lIns="0" tIns="0" rIns="0" bIns="0" rtlCol="0" anchor="ctr"/>
           <a:lstStyle/>
           <a:p>
-            <a:pPr indent="0" marL="0">
+            <a:pPr marL="0" indent="0">
               <a:buNone/>
             </a:pPr>
             <a:r>
@@ -6091,6 +5989,13 @@
             <a:prstDash val="solid"/>
           </a:ln>
         </p:spPr>
+        <p:txBody>
+          <a:bodyPr/>
+          <a:lstStyle/>
+          <a:p>
+            <a:endParaRPr lang="ko-KR" altLang="en-US"/>
+          </a:p>
+        </p:txBody>
       </p:sp>
       <p:sp>
         <p:nvSpPr>
@@ -6113,7 +6018,7 @@
           <a:bodyPr wrap="square" lIns="0" tIns="0" rIns="0" bIns="0" rtlCol="0" anchor="ctr"/>
           <a:lstStyle/>
           <a:p>
-            <a:pPr indent="0" marL="0">
+            <a:pPr marL="0" indent="0">
               <a:buNone/>
             </a:pPr>
             <a:r>
@@ -6152,7 +6057,7 @@
           <a:bodyPr wrap="square" lIns="0" tIns="0" rIns="0" bIns="0" rtlCol="0" anchor="ctr"/>
           <a:lstStyle/>
           <a:p>
-            <a:pPr indent="0" marL="0">
+            <a:pPr marL="0" indent="0">
               <a:buNone/>
             </a:pPr>
             <a:r>
@@ -6191,7 +6096,7 @@
           <a:bodyPr wrap="square" lIns="0" tIns="0" rIns="0" bIns="0" rtlCol="0" anchor="ctr"/>
           <a:lstStyle/>
           <a:p>
-            <a:pPr indent="0" marL="0">
+            <a:pPr marL="0" indent="0">
               <a:buNone/>
             </a:pPr>
             <a:r>
@@ -6230,7 +6135,7 @@
           <a:bodyPr wrap="square" lIns="0" tIns="0" rIns="0" bIns="0" rtlCol="0" anchor="ctr"/>
           <a:lstStyle/>
           <a:p>
-            <a:pPr indent="0" marL="0">
+            <a:pPr marL="0" indent="0">
               <a:buNone/>
             </a:pPr>
             <a:r>
@@ -6294,7 +6199,7 @@
           <a:bodyPr wrap="square" lIns="0" tIns="0" rIns="0" bIns="0" rtlCol="0" anchor="ctr"/>
           <a:lstStyle/>
           <a:p>
-            <a:pPr indent="0" marL="0">
+            <a:pPr marL="0" indent="0">
               <a:buNone/>
             </a:pPr>
             <a:r>
@@ -6333,7 +6238,7 @@
           <a:bodyPr wrap="square" lIns="0" tIns="0" rIns="0" bIns="0" rtlCol="0" anchor="ctr"/>
           <a:lstStyle/>
           <a:p>
-            <a:pPr indent="0" marL="0">
+            <a:pPr marL="0" indent="0">
               <a:buNone/>
             </a:pPr>
             <a:r>
@@ -6377,6 +6282,13 @@
             <a:prstDash val="solid"/>
           </a:ln>
         </p:spPr>
+        <p:txBody>
+          <a:bodyPr/>
+          <a:lstStyle/>
+          <a:p>
+            <a:endParaRPr lang="ko-KR" altLang="en-US"/>
+          </a:p>
+        </p:txBody>
       </p:sp>
       <p:sp>
         <p:nvSpPr>
@@ -6397,6 +6309,13 @@
           </a:solidFill>
           <a:ln/>
         </p:spPr>
+        <p:txBody>
+          <a:bodyPr/>
+          <a:lstStyle/>
+          <a:p>
+            <a:endParaRPr lang="ko-KR" altLang="en-US"/>
+          </a:p>
+        </p:txBody>
       </p:sp>
       <p:sp>
         <p:nvSpPr>
@@ -6419,7 +6338,7 @@
           <a:bodyPr wrap="square" lIns="0" tIns="0" rIns="0" bIns="0" rtlCol="0" anchor="ctr"/>
           <a:lstStyle/>
           <a:p>
-            <a:pPr algn="ctr" indent="0" marL="0">
+            <a:pPr marL="0" indent="0" algn="ctr">
               <a:buNone/>
             </a:pPr>
             <a:r>
@@ -6458,7 +6377,7 @@
           <a:bodyPr wrap="square" lIns="0" tIns="0" rIns="0" bIns="0" rtlCol="0" anchor="ctr"/>
           <a:lstStyle/>
           <a:p>
-            <a:pPr indent="0" marL="0">
+            <a:pPr marL="0" indent="0">
               <a:buNone/>
             </a:pPr>
             <a:r>
@@ -6497,7 +6416,7 @@
           <a:bodyPr wrap="square" lIns="0" tIns="0" rIns="0" bIns="0" rtlCol="0" anchor="ctr"/>
           <a:lstStyle/>
           <a:p>
-            <a:pPr indent="0" marL="0">
+            <a:pPr marL="0" indent="0">
               <a:buNone/>
             </a:pPr>
             <a:r>
@@ -6541,6 +6460,13 @@
             <a:prstDash val="solid"/>
           </a:ln>
         </p:spPr>
+        <p:txBody>
+          <a:bodyPr/>
+          <a:lstStyle/>
+          <a:p>
+            <a:endParaRPr lang="ko-KR" altLang="en-US"/>
+          </a:p>
+        </p:txBody>
       </p:sp>
       <p:sp>
         <p:nvSpPr>
@@ -6561,6 +6487,13 @@
           </a:solidFill>
           <a:ln/>
         </p:spPr>
+        <p:txBody>
+          <a:bodyPr/>
+          <a:lstStyle/>
+          <a:p>
+            <a:endParaRPr lang="ko-KR" altLang="en-US"/>
+          </a:p>
+        </p:txBody>
       </p:sp>
       <p:sp>
         <p:nvSpPr>
@@ -6583,7 +6516,7 @@
           <a:bodyPr wrap="square" lIns="0" tIns="0" rIns="0" bIns="0" rtlCol="0" anchor="ctr"/>
           <a:lstStyle/>
           <a:p>
-            <a:pPr algn="ctr" indent="0" marL="0">
+            <a:pPr marL="0" indent="0" algn="ctr">
               <a:buNone/>
             </a:pPr>
             <a:r>
@@ -6622,7 +6555,7 @@
           <a:bodyPr wrap="square" lIns="0" tIns="0" rIns="0" bIns="0" rtlCol="0" anchor="ctr"/>
           <a:lstStyle/>
           <a:p>
-            <a:pPr indent="0" marL="0">
+            <a:pPr marL="0" indent="0">
               <a:buNone/>
             </a:pPr>
             <a:r>
@@ -6661,7 +6594,7 @@
           <a:bodyPr wrap="square" lIns="0" tIns="0" rIns="0" bIns="0" rtlCol="0" anchor="ctr"/>
           <a:lstStyle/>
           <a:p>
-            <a:pPr indent="0" marL="0">
+            <a:pPr marL="0" indent="0">
               <a:buNone/>
             </a:pPr>
             <a:r>
@@ -6705,6 +6638,13 @@
             <a:prstDash val="solid"/>
           </a:ln>
         </p:spPr>
+        <p:txBody>
+          <a:bodyPr/>
+          <a:lstStyle/>
+          <a:p>
+            <a:endParaRPr lang="ko-KR" altLang="en-US"/>
+          </a:p>
+        </p:txBody>
       </p:sp>
       <p:sp>
         <p:nvSpPr>
@@ -6725,6 +6665,13 @@
           </a:solidFill>
           <a:ln/>
         </p:spPr>
+        <p:txBody>
+          <a:bodyPr/>
+          <a:lstStyle/>
+          <a:p>
+            <a:endParaRPr lang="ko-KR" altLang="en-US"/>
+          </a:p>
+        </p:txBody>
       </p:sp>
       <p:sp>
         <p:nvSpPr>
@@ -6747,7 +6694,7 @@
           <a:bodyPr wrap="square" lIns="0" tIns="0" rIns="0" bIns="0" rtlCol="0" anchor="ctr"/>
           <a:lstStyle/>
           <a:p>
-            <a:pPr algn="ctr" indent="0" marL="0">
+            <a:pPr marL="0" indent="0" algn="ctr">
               <a:buNone/>
             </a:pPr>
             <a:r>
@@ -6786,7 +6733,7 @@
           <a:bodyPr wrap="square" lIns="0" tIns="0" rIns="0" bIns="0" rtlCol="0" anchor="ctr"/>
           <a:lstStyle/>
           <a:p>
-            <a:pPr indent="0" marL="0">
+            <a:pPr marL="0" indent="0">
               <a:buNone/>
             </a:pPr>
             <a:r>
@@ -6825,7 +6772,7 @@
           <a:bodyPr wrap="square" lIns="0" tIns="0" rIns="0" bIns="0" rtlCol="0" anchor="ctr"/>
           <a:lstStyle/>
           <a:p>
-            <a:pPr indent="0" marL="0">
+            <a:pPr marL="0" indent="0">
               <a:buNone/>
             </a:pPr>
             <a:r>
@@ -6864,7 +6811,7 @@
           <a:bodyPr wrap="square" lIns="0" tIns="0" rIns="0" bIns="0" rtlCol="0" anchor="ctr"/>
           <a:lstStyle/>
           <a:p>
-            <a:pPr indent="0" marL="0">
+            <a:pPr marL="0" indent="0">
               <a:buNone/>
             </a:pPr>
             <a:r>
@@ -6903,7 +6850,7 @@
           <a:bodyPr wrap="square" lIns="0" tIns="0" rIns="0" bIns="0" rtlCol="0" anchor="ctr"/>
           <a:lstStyle/>
           <a:p>
-            <a:pPr indent="0" marL="0">
+            <a:pPr marL="0" indent="0">
               <a:buNone/>
             </a:pPr>
             <a:r>
@@ -6942,7 +6889,7 @@
           <a:bodyPr wrap="square" lIns="0" tIns="0" rIns="0" bIns="0" rtlCol="0" anchor="ctr"/>
           <a:lstStyle/>
           <a:p>
-            <a:pPr indent="0" marL="0">
+            <a:pPr marL="0" indent="0">
               <a:buNone/>
             </a:pPr>
             <a:r>
@@ -6981,7 +6928,7 @@
           <a:bodyPr wrap="square" lIns="0" tIns="0" rIns="0" bIns="0" rtlCol="0" anchor="ctr"/>
           <a:lstStyle/>
           <a:p>
-            <a:pPr indent="0" marL="0">
+            <a:pPr marL="0" indent="0">
               <a:buNone/>
             </a:pPr>
             <a:r>
@@ -7021,6 +6968,13 @@
             <a:prstDash val="solid"/>
           </a:ln>
         </p:spPr>
+        <p:txBody>
+          <a:bodyPr/>
+          <a:lstStyle/>
+          <a:p>
+            <a:endParaRPr lang="ko-KR" altLang="en-US"/>
+          </a:p>
+        </p:txBody>
       </p:sp>
       <p:sp>
         <p:nvSpPr>
@@ -7043,7 +6997,7 @@
           <a:bodyPr wrap="square" lIns="0" tIns="0" rIns="0" bIns="0" rtlCol="0" anchor="ctr"/>
           <a:lstStyle/>
           <a:p>
-            <a:pPr indent="0" marL="0">
+            <a:pPr marL="0" indent="0">
               <a:buNone/>
             </a:pPr>
             <a:r>
@@ -7082,7 +7036,7 @@
           <a:bodyPr wrap="square" lIns="0" tIns="0" rIns="0" bIns="0" rtlCol="0" anchor="ctr"/>
           <a:lstStyle/>
           <a:p>
-            <a:pPr indent="0" marL="0">
+            <a:pPr marL="0" indent="0">
               <a:buNone/>
             </a:pPr>
             <a:r>
@@ -7121,7 +7075,7 @@
           <a:bodyPr wrap="square" lIns="0" tIns="0" rIns="0" bIns="0" rtlCol="0" anchor="ctr"/>
           <a:lstStyle/>
           <a:p>
-            <a:pPr indent="0" marL="0">
+            <a:pPr marL="0" indent="0">
               <a:buNone/>
             </a:pPr>
             <a:r>
@@ -7161,6 +7115,13 @@
             <a:prstDash val="solid"/>
           </a:ln>
         </p:spPr>
+        <p:txBody>
+          <a:bodyPr/>
+          <a:lstStyle/>
+          <a:p>
+            <a:endParaRPr lang="ko-KR" altLang="en-US"/>
+          </a:p>
+        </p:txBody>
       </p:sp>
       <p:sp>
         <p:nvSpPr>
@@ -7183,7 +7144,7 @@
           <a:bodyPr wrap="square" lIns="0" tIns="0" rIns="0" bIns="0" rtlCol="0" anchor="ctr"/>
           <a:lstStyle/>
           <a:p>
-            <a:pPr indent="0" marL="0">
+            <a:pPr marL="0" indent="0">
               <a:buNone/>
             </a:pPr>
             <a:r>
@@ -7222,7 +7183,7 @@
           <a:bodyPr wrap="square" lIns="0" tIns="0" rIns="0" bIns="0" rtlCol="0" anchor="ctr"/>
           <a:lstStyle/>
           <a:p>
-            <a:pPr indent="0" marL="0">
+            <a:pPr marL="0" indent="0">
               <a:buNone/>
             </a:pPr>
             <a:r>
@@ -7261,7 +7222,7 @@
           <a:bodyPr wrap="square" lIns="0" tIns="0" rIns="0" bIns="0" rtlCol="0" anchor="ctr"/>
           <a:lstStyle/>
           <a:p>
-            <a:pPr indent="0" marL="0">
+            <a:pPr marL="0" indent="0">
               <a:buNone/>
             </a:pPr>
             <a:r>
@@ -7301,6 +7262,13 @@
             <a:prstDash val="solid"/>
           </a:ln>
         </p:spPr>
+        <p:txBody>
+          <a:bodyPr/>
+          <a:lstStyle/>
+          <a:p>
+            <a:endParaRPr lang="ko-KR" altLang="en-US"/>
+          </a:p>
+        </p:txBody>
       </p:sp>
       <p:sp>
         <p:nvSpPr>
@@ -7323,7 +7291,7 @@
           <a:bodyPr wrap="square" lIns="0" tIns="0" rIns="0" bIns="0" rtlCol="0" anchor="ctr"/>
           <a:lstStyle/>
           <a:p>
-            <a:pPr indent="0" marL="0">
+            <a:pPr marL="0" indent="0">
               <a:buNone/>
             </a:pPr>
             <a:r>
@@ -7362,7 +7330,7 @@
           <a:bodyPr wrap="square" lIns="0" tIns="0" rIns="0" bIns="0" rtlCol="0" anchor="ctr"/>
           <a:lstStyle/>
           <a:p>
-            <a:pPr indent="0" marL="0">
+            <a:pPr marL="0" indent="0">
               <a:buNone/>
             </a:pPr>
             <a:r>
@@ -7401,7 +7369,7 @@
           <a:bodyPr wrap="square" lIns="0" tIns="0" rIns="0" bIns="0" rtlCol="0" anchor="ctr"/>
           <a:lstStyle/>
           <a:p>
-            <a:pPr indent="0" marL="0">
+            <a:pPr marL="0" indent="0">
               <a:buNone/>
             </a:pPr>
             <a:r>
@@ -7465,7 +7433,7 @@
           <a:bodyPr wrap="square" lIns="0" tIns="0" rIns="0" bIns="0" rtlCol="0" anchor="ctr"/>
           <a:lstStyle/>
           <a:p>
-            <a:pPr indent="0" marL="0">
+            <a:pPr marL="0" indent="0">
               <a:buNone/>
             </a:pPr>
             <a:r>
@@ -7504,7 +7472,7 @@
           <a:bodyPr wrap="square" lIns="0" tIns="0" rIns="0" bIns="0" rtlCol="0" anchor="ctr"/>
           <a:lstStyle/>
           <a:p>
-            <a:pPr indent="0" marL="0">
+            <a:pPr marL="0" indent="0">
               <a:buNone/>
             </a:pPr>
             <a:r>
@@ -7548,6 +7516,13 @@
             <a:prstDash val="solid"/>
           </a:ln>
         </p:spPr>
+        <p:txBody>
+          <a:bodyPr/>
+          <a:lstStyle/>
+          <a:p>
+            <a:endParaRPr lang="ko-KR" altLang="en-US"/>
+          </a:p>
+        </p:txBody>
       </p:sp>
       <p:sp>
         <p:nvSpPr>
@@ -7570,7 +7545,7 @@
           <a:bodyPr wrap="square" lIns="0" tIns="0" rIns="0" bIns="0" rtlCol="0" anchor="ctr"/>
           <a:lstStyle/>
           <a:p>
-            <a:pPr indent="0" marL="0">
+            <a:pPr marL="0" indent="0">
               <a:buNone/>
             </a:pPr>
             <a:r>
@@ -7609,7 +7584,7 @@
           <a:bodyPr wrap="square" lIns="0" tIns="0" rIns="0" bIns="0" rtlCol="0" anchor="ctr"/>
           <a:lstStyle/>
           <a:p>
-            <a:pPr indent="0" marL="0">
+            <a:pPr marL="0" indent="0">
               <a:buNone/>
             </a:pPr>
             <a:r>
@@ -7653,6 +7628,13 @@
             <a:prstDash val="solid"/>
           </a:ln>
         </p:spPr>
+        <p:txBody>
+          <a:bodyPr/>
+          <a:lstStyle/>
+          <a:p>
+            <a:endParaRPr lang="ko-KR" altLang="en-US"/>
+          </a:p>
+        </p:txBody>
       </p:sp>
       <p:sp>
         <p:nvSpPr>
@@ -7675,7 +7657,7 @@
           <a:bodyPr wrap="square" lIns="0" tIns="0" rIns="0" bIns="0" rtlCol="0" anchor="ctr"/>
           <a:lstStyle/>
           <a:p>
-            <a:pPr indent="0" marL="0">
+            <a:pPr marL="0" indent="0">
               <a:buNone/>
             </a:pPr>
             <a:r>
@@ -7714,7 +7696,7 @@
           <a:bodyPr wrap="square" lIns="0" tIns="0" rIns="0" bIns="0" rtlCol="0" anchor="ctr"/>
           <a:lstStyle/>
           <a:p>
-            <a:pPr indent="0" marL="0">
+            <a:pPr marL="0" indent="0">
               <a:buNone/>
             </a:pPr>
             <a:r>
@@ -7758,6 +7740,13 @@
             <a:prstDash val="solid"/>
           </a:ln>
         </p:spPr>
+        <p:txBody>
+          <a:bodyPr/>
+          <a:lstStyle/>
+          <a:p>
+            <a:endParaRPr lang="ko-KR" altLang="en-US"/>
+          </a:p>
+        </p:txBody>
       </p:sp>
       <p:sp>
         <p:nvSpPr>
@@ -7780,7 +7769,7 @@
           <a:bodyPr wrap="square" lIns="0" tIns="0" rIns="0" bIns="0" rtlCol="0" anchor="ctr"/>
           <a:lstStyle/>
           <a:p>
-            <a:pPr indent="0" marL="0">
+            <a:pPr marL="0" indent="0">
               <a:buNone/>
             </a:pPr>
             <a:r>
@@ -7819,7 +7808,7 @@
           <a:bodyPr wrap="square" lIns="0" tIns="0" rIns="0" bIns="0" rtlCol="0" anchor="ctr"/>
           <a:lstStyle/>
           <a:p>
-            <a:pPr indent="0" marL="0">
+            <a:pPr marL="0" indent="0">
               <a:buNone/>
             </a:pPr>
             <a:r>
@@ -7863,6 +7852,13 @@
             <a:prstDash val="solid"/>
           </a:ln>
         </p:spPr>
+        <p:txBody>
+          <a:bodyPr/>
+          <a:lstStyle/>
+          <a:p>
+            <a:endParaRPr lang="ko-KR" altLang="en-US"/>
+          </a:p>
+        </p:txBody>
       </p:sp>
       <p:sp>
         <p:nvSpPr>
@@ -7885,7 +7881,7 @@
           <a:bodyPr wrap="square" lIns="0" tIns="0" rIns="0" bIns="0" rtlCol="0" anchor="ctr"/>
           <a:lstStyle/>
           <a:p>
-            <a:pPr indent="0" marL="0">
+            <a:pPr marL="0" indent="0">
               <a:buNone/>
             </a:pPr>
             <a:r>
@@ -7924,7 +7920,7 @@
           <a:bodyPr wrap="square" lIns="0" tIns="0" rIns="0" bIns="0" rtlCol="0" anchor="ctr"/>
           <a:lstStyle/>
           <a:p>
-            <a:pPr indent="0" marL="0">
+            <a:pPr marL="0" indent="0">
               <a:buNone/>
             </a:pPr>
             <a:r>
@@ -7968,6 +7964,13 @@
             <a:prstDash val="solid"/>
           </a:ln>
         </p:spPr>
+        <p:txBody>
+          <a:bodyPr/>
+          <a:lstStyle/>
+          <a:p>
+            <a:endParaRPr lang="ko-KR" altLang="en-US"/>
+          </a:p>
+        </p:txBody>
       </p:sp>
       <p:sp>
         <p:nvSpPr>
@@ -7990,7 +7993,7 @@
           <a:bodyPr wrap="square" lIns="0" tIns="0" rIns="0" bIns="0" rtlCol="0" anchor="ctr"/>
           <a:lstStyle/>
           <a:p>
-            <a:pPr indent="0" marL="0">
+            <a:pPr marL="0" indent="0">
               <a:buNone/>
             </a:pPr>
             <a:r>
@@ -8029,7 +8032,7 @@
           <a:bodyPr wrap="square" lIns="0" tIns="0" rIns="0" bIns="0" rtlCol="0" anchor="ctr"/>
           <a:lstStyle/>
           <a:p>
-            <a:pPr indent="0" marL="0">
+            <a:pPr marL="0" indent="0">
               <a:buNone/>
             </a:pPr>
             <a:r>
@@ -8073,6 +8076,13 @@
             <a:prstDash val="solid"/>
           </a:ln>
         </p:spPr>
+        <p:txBody>
+          <a:bodyPr/>
+          <a:lstStyle/>
+          <a:p>
+            <a:endParaRPr lang="ko-KR" altLang="en-US"/>
+          </a:p>
+        </p:txBody>
       </p:sp>
       <p:sp>
         <p:nvSpPr>
@@ -8095,7 +8105,7 @@
           <a:bodyPr wrap="square" lIns="0" tIns="0" rIns="0" bIns="0" rtlCol="0" anchor="ctr"/>
           <a:lstStyle/>
           <a:p>
-            <a:pPr indent="0" marL="0">
+            <a:pPr marL="0" indent="0">
               <a:buNone/>
             </a:pPr>
             <a:r>
@@ -8134,7 +8144,7 @@
           <a:bodyPr wrap="square" lIns="0" tIns="0" rIns="0" bIns="0" rtlCol="0" anchor="ctr"/>
           <a:lstStyle/>
           <a:p>
-            <a:pPr indent="0" marL="0">
+            <a:pPr marL="0" indent="0">
               <a:buNone/>
             </a:pPr>
             <a:r>
@@ -8178,6 +8188,13 @@
             <a:prstDash val="solid"/>
           </a:ln>
         </p:spPr>
+        <p:txBody>
+          <a:bodyPr/>
+          <a:lstStyle/>
+          <a:p>
+            <a:endParaRPr lang="ko-KR" altLang="en-US"/>
+          </a:p>
+        </p:txBody>
       </p:sp>
       <p:sp>
         <p:nvSpPr>
@@ -8200,7 +8217,7 @@
           <a:bodyPr wrap="square" lIns="0" tIns="0" rIns="0" bIns="0" rtlCol="0" anchor="ctr"/>
           <a:lstStyle/>
           <a:p>
-            <a:pPr indent="0" marL="0">
+            <a:pPr marL="0" indent="0">
               <a:buNone/>
             </a:pPr>
             <a:r>
@@ -8264,7 +8281,7 @@
           <a:bodyPr wrap="square" lIns="0" tIns="0" rIns="0" bIns="0" rtlCol="0" anchor="ctr"/>
           <a:lstStyle/>
           <a:p>
-            <a:pPr indent="0" marL="0">
+            <a:pPr marL="0" indent="0">
               <a:buNone/>
             </a:pPr>
             <a:r>
@@ -8303,7 +8320,7 @@
           <a:bodyPr wrap="square" lIns="0" tIns="0" rIns="0" bIns="0" rtlCol="0" anchor="ctr"/>
           <a:lstStyle/>
           <a:p>
-            <a:pPr indent="0" marL="0">
+            <a:pPr marL="0" indent="0">
               <a:buNone/>
             </a:pPr>
             <a:r>
@@ -8347,6 +8364,13 @@
             <a:prstDash val="solid"/>
           </a:ln>
         </p:spPr>
+        <p:txBody>
+          <a:bodyPr/>
+          <a:lstStyle/>
+          <a:p>
+            <a:endParaRPr lang="ko-KR" altLang="en-US"/>
+          </a:p>
+        </p:txBody>
       </p:sp>
       <p:sp>
         <p:nvSpPr>
@@ -8369,7 +8393,7 @@
           <a:bodyPr wrap="square" lIns="0" tIns="0" rIns="0" bIns="0" rtlCol="0" anchor="ctr"/>
           <a:lstStyle/>
           <a:p>
-            <a:pPr indent="0" marL="0">
+            <a:pPr marL="0" indent="0">
               <a:buNone/>
             </a:pPr>
             <a:r>
@@ -8408,7 +8432,7 @@
           <a:bodyPr wrap="square" lIns="0" tIns="0" rIns="0" bIns="0" rtlCol="0" anchor="ctr"/>
           <a:lstStyle/>
           <a:p>
-            <a:pPr indent="0" marL="0">
+            <a:pPr marL="0" indent="0">
               <a:buNone/>
             </a:pPr>
             <a:r>
@@ -8447,7 +8471,7 @@
           <a:bodyPr wrap="square" lIns="0" tIns="0" rIns="0" bIns="0" rtlCol="0" anchor="ctr"/>
           <a:lstStyle/>
           <a:p>
-            <a:pPr indent="0" marL="0">
+            <a:pPr marL="0" indent="0">
               <a:buNone/>
             </a:pPr>
             <a:r>
@@ -8486,7 +8510,7 @@
           <a:bodyPr wrap="square" lIns="0" tIns="0" rIns="0" bIns="0" rtlCol="0" anchor="ctr"/>
           <a:lstStyle/>
           <a:p>
-            <a:pPr indent="0" marL="0">
+            <a:pPr marL="0" indent="0">
               <a:buNone/>
             </a:pPr>
             <a:r>
@@ -8525,7 +8549,7 @@
           <a:bodyPr wrap="square" lIns="0" tIns="0" rIns="0" bIns="0" rtlCol="0" anchor="ctr"/>
           <a:lstStyle/>
           <a:p>
-            <a:pPr indent="0" marL="0">
+            <a:pPr marL="0" indent="0">
               <a:buNone/>
             </a:pPr>
             <a:r>
@@ -8569,6 +8593,13 @@
             <a:prstDash val="solid"/>
           </a:ln>
         </p:spPr>
+        <p:txBody>
+          <a:bodyPr/>
+          <a:lstStyle/>
+          <a:p>
+            <a:endParaRPr lang="ko-KR" altLang="en-US"/>
+          </a:p>
+        </p:txBody>
       </p:sp>
       <p:sp>
         <p:nvSpPr>
@@ -8591,7 +8622,7 @@
           <a:bodyPr wrap="square" lIns="0" tIns="0" rIns="0" bIns="0" rtlCol="0" anchor="ctr"/>
           <a:lstStyle/>
           <a:p>
-            <a:pPr indent="0" marL="0">
+            <a:pPr marL="0" indent="0">
               <a:buNone/>
             </a:pPr>
             <a:r>
@@ -8630,7 +8661,7 @@
           <a:bodyPr wrap="square" lIns="0" tIns="0" rIns="0" bIns="0" rtlCol="0" anchor="ctr"/>
           <a:lstStyle/>
           <a:p>
-            <a:pPr indent="0" marL="0">
+            <a:pPr marL="0" indent="0">
               <a:buNone/>
             </a:pPr>
             <a:r>
@@ -8669,7 +8700,7 @@
           <a:bodyPr wrap="square" lIns="0" tIns="0" rIns="0" bIns="0" rtlCol="0" anchor="ctr"/>
           <a:lstStyle/>
           <a:p>
-            <a:pPr indent="0" marL="0">
+            <a:pPr marL="0" indent="0">
               <a:buNone/>
             </a:pPr>
             <a:r>
@@ -8708,7 +8739,7 @@
           <a:bodyPr wrap="square" lIns="0" tIns="0" rIns="0" bIns="0" rtlCol="0" anchor="ctr"/>
           <a:lstStyle/>
           <a:p>
-            <a:pPr indent="0" marL="0">
+            <a:pPr marL="0" indent="0">
               <a:buNone/>
             </a:pPr>
             <a:r>
@@ -8747,7 +8778,7 @@
           <a:bodyPr wrap="square" lIns="0" tIns="0" rIns="0" bIns="0" rtlCol="0" anchor="ctr"/>
           <a:lstStyle/>
           <a:p>
-            <a:pPr indent="0" marL="0">
+            <a:pPr marL="0" indent="0">
               <a:buNone/>
             </a:pPr>
             <a:r>
@@ -8791,6 +8822,13 @@
             <a:prstDash val="solid"/>
           </a:ln>
         </p:spPr>
+        <p:txBody>
+          <a:bodyPr/>
+          <a:lstStyle/>
+          <a:p>
+            <a:endParaRPr lang="ko-KR" altLang="en-US"/>
+          </a:p>
+        </p:txBody>
       </p:sp>
       <p:sp>
         <p:nvSpPr>
@@ -8813,7 +8851,7 @@
           <a:bodyPr wrap="square" lIns="0" tIns="0" rIns="0" bIns="0" rtlCol="0" anchor="ctr"/>
           <a:lstStyle/>
           <a:p>
-            <a:pPr indent="0" marL="0">
+            <a:pPr marL="0" indent="0">
               <a:buNone/>
             </a:pPr>
             <a:r>
@@ -8852,7 +8890,7 @@
           <a:bodyPr wrap="square" lIns="0" tIns="0" rIns="0" bIns="0" rtlCol="0" anchor="ctr"/>
           <a:lstStyle/>
           <a:p>
-            <a:pPr indent="0" marL="0">
+            <a:pPr marL="0" indent="0">
               <a:buNone/>
             </a:pPr>
             <a:r>
@@ -8891,7 +8929,7 @@
           <a:bodyPr wrap="square" lIns="0" tIns="0" rIns="0" bIns="0" rtlCol="0" anchor="ctr"/>
           <a:lstStyle/>
           <a:p>
-            <a:pPr indent="0" marL="0">
+            <a:pPr marL="0" indent="0">
               <a:buNone/>
             </a:pPr>
             <a:r>
@@ -8930,7 +8968,7 @@
           <a:bodyPr wrap="square" lIns="0" tIns="0" rIns="0" bIns="0" rtlCol="0" anchor="ctr"/>
           <a:lstStyle/>
           <a:p>
-            <a:pPr indent="0" marL="0">
+            <a:pPr marL="0" indent="0">
               <a:buNone/>
             </a:pPr>
             <a:r>
@@ -8969,7 +9007,7 @@
           <a:bodyPr wrap="square" lIns="0" tIns="0" rIns="0" bIns="0" rtlCol="0" anchor="ctr"/>
           <a:lstStyle/>
           <a:p>
-            <a:pPr indent="0" marL="0">
+            <a:pPr marL="0" indent="0">
               <a:buNone/>
             </a:pPr>
             <a:r>
@@ -9013,6 +9051,13 @@
             <a:prstDash val="solid"/>
           </a:ln>
         </p:spPr>
+        <p:txBody>
+          <a:bodyPr/>
+          <a:lstStyle/>
+          <a:p>
+            <a:endParaRPr lang="ko-KR" altLang="en-US"/>
+          </a:p>
+        </p:txBody>
       </p:sp>
       <p:sp>
         <p:nvSpPr>
@@ -9035,7 +9080,7 @@
           <a:bodyPr wrap="square" lIns="0" tIns="0" rIns="0" bIns="0" rtlCol="0" anchor="ctr"/>
           <a:lstStyle/>
           <a:p>
-            <a:pPr indent="0" marL="0">
+            <a:pPr marL="0" indent="0">
               <a:buNone/>
             </a:pPr>
             <a:r>
@@ -9074,7 +9119,7 @@
           <a:bodyPr wrap="square" lIns="0" tIns="0" rIns="0" bIns="0" rtlCol="0" anchor="ctr"/>
           <a:lstStyle/>
           <a:p>
-            <a:pPr indent="0" marL="0">
+            <a:pPr marL="0" indent="0">
               <a:buNone/>
             </a:pPr>
             <a:r>
@@ -9113,7 +9158,7 @@
           <a:bodyPr wrap="square" lIns="0" tIns="0" rIns="0" bIns="0" rtlCol="0" anchor="ctr"/>
           <a:lstStyle/>
           <a:p>
-            <a:pPr indent="0" marL="0">
+            <a:pPr marL="0" indent="0">
               <a:buNone/>
             </a:pPr>
             <a:r>
@@ -9152,7 +9197,7 @@
           <a:bodyPr wrap="square" lIns="0" tIns="0" rIns="0" bIns="0" rtlCol="0" anchor="ctr"/>
           <a:lstStyle/>
           <a:p>
-            <a:pPr indent="0" marL="0">
+            <a:pPr marL="0" indent="0">
               <a:buNone/>
             </a:pPr>
             <a:r>
@@ -9191,7 +9236,7 @@
           <a:bodyPr wrap="square" lIns="0" tIns="0" rIns="0" bIns="0" rtlCol="0" anchor="ctr"/>
           <a:lstStyle/>
           <a:p>
-            <a:pPr indent="0" marL="0">
+            <a:pPr marL="0" indent="0">
               <a:buNone/>
             </a:pPr>
             <a:r>
@@ -9235,6 +9280,13 @@
             <a:prstDash val="solid"/>
           </a:ln>
         </p:spPr>
+        <p:txBody>
+          <a:bodyPr/>
+          <a:lstStyle/>
+          <a:p>
+            <a:endParaRPr lang="ko-KR" altLang="en-US"/>
+          </a:p>
+        </p:txBody>
       </p:sp>
       <p:sp>
         <p:nvSpPr>
@@ -9257,7 +9309,7 @@
           <a:bodyPr wrap="square" lIns="0" tIns="0" rIns="0" bIns="0" rtlCol="0" anchor="ctr"/>
           <a:lstStyle/>
           <a:p>
-            <a:pPr indent="0" marL="0">
+            <a:pPr marL="0" indent="0">
               <a:buNone/>
             </a:pPr>
             <a:r>
@@ -9296,7 +9348,7 @@
           <a:bodyPr wrap="square" lIns="0" tIns="0" rIns="0" bIns="0" rtlCol="0" anchor="ctr"/>
           <a:lstStyle/>
           <a:p>
-            <a:pPr indent="0" marL="0">
+            <a:pPr marL="0" indent="0">
               <a:buNone/>
             </a:pPr>
             <a:r>
@@ -9335,7 +9387,7 @@
           <a:bodyPr wrap="square" lIns="0" tIns="0" rIns="0" bIns="0" rtlCol="0" anchor="ctr"/>
           <a:lstStyle/>
           <a:p>
-            <a:pPr indent="0" marL="0">
+            <a:pPr marL="0" indent="0">
               <a:buNone/>
             </a:pPr>
             <a:r>
@@ -9374,7 +9426,7 @@
           <a:bodyPr wrap="square" lIns="0" tIns="0" rIns="0" bIns="0" rtlCol="0" anchor="ctr"/>
           <a:lstStyle/>
           <a:p>
-            <a:pPr indent="0" marL="0">
+            <a:pPr marL="0" indent="0">
               <a:buNone/>
             </a:pPr>
             <a:r>
@@ -9413,7 +9465,7 @@
           <a:bodyPr wrap="square" lIns="0" tIns="0" rIns="0" bIns="0" rtlCol="0" anchor="ctr"/>
           <a:lstStyle/>
           <a:p>
-            <a:pPr indent="0" marL="0">
+            <a:pPr marL="0" indent="0">
               <a:buNone/>
             </a:pPr>
             <a:r>
@@ -9452,7 +9504,7 @@
           <a:bodyPr wrap="square" lIns="0" tIns="0" rIns="0" bIns="0" rtlCol="0" anchor="ctr"/>
           <a:lstStyle/>
           <a:p>
-            <a:pPr indent="0" marL="0">
+            <a:pPr marL="0" indent="0">
               <a:buNone/>
             </a:pPr>
             <a:r>
@@ -9516,7 +9568,7 @@
           <a:bodyPr wrap="square" lIns="0" tIns="0" rIns="0" bIns="0" rtlCol="0" anchor="ctr"/>
           <a:lstStyle/>
           <a:p>
-            <a:pPr indent="0" marL="0">
+            <a:pPr marL="0" indent="0">
               <a:buNone/>
             </a:pPr>
             <a:r>
@@ -9555,7 +9607,7 @@
           <a:bodyPr wrap="square" lIns="0" tIns="0" rIns="0" bIns="0" rtlCol="0" anchor="ctr"/>
           <a:lstStyle/>
           <a:p>
-            <a:pPr indent="0" marL="0">
+            <a:pPr marL="0" indent="0">
               <a:buNone/>
             </a:pPr>
             <a:r>
@@ -9599,6 +9651,13 @@
             <a:prstDash val="solid"/>
           </a:ln>
         </p:spPr>
+        <p:txBody>
+          <a:bodyPr/>
+          <a:lstStyle/>
+          <a:p>
+            <a:endParaRPr lang="ko-KR" altLang="en-US"/>
+          </a:p>
+        </p:txBody>
       </p:sp>
       <p:sp>
         <p:nvSpPr>
@@ -9621,7 +9680,7 @@
           <a:bodyPr wrap="square" lIns="0" tIns="0" rIns="0" bIns="0" rtlCol="0" anchor="ctr"/>
           <a:lstStyle/>
           <a:p>
-            <a:pPr indent="0" marL="0">
+            <a:pPr marL="0" indent="0">
               <a:buNone/>
             </a:pPr>
             <a:r>
@@ -9750,6 +9809,13 @@
             <a:prstDash val="solid"/>
           </a:ln>
         </p:spPr>
+        <p:txBody>
+          <a:bodyPr/>
+          <a:lstStyle/>
+          <a:p>
+            <a:endParaRPr lang="ko-KR" altLang="en-US"/>
+          </a:p>
+        </p:txBody>
       </p:sp>
       <p:sp>
         <p:nvSpPr>
@@ -9772,7 +9838,7 @@
           <a:bodyPr wrap="square" lIns="0" tIns="0" rIns="0" bIns="0" rtlCol="0" anchor="ctr"/>
           <a:lstStyle/>
           <a:p>
-            <a:pPr indent="0" marL="0">
+            <a:pPr marL="0" indent="0">
               <a:buNone/>
             </a:pPr>
             <a:r>
@@ -9811,7 +9877,7 @@
           <a:bodyPr wrap="square" lIns="0" tIns="0" rIns="0" bIns="0" rtlCol="0" anchor="ctr"/>
           <a:lstStyle/>
           <a:p>
-            <a:pPr indent="0" marL="0">
+            <a:pPr marL="0" indent="0">
               <a:buNone/>
             </a:pPr>
             <a:r>
@@ -9850,7 +9916,7 @@
           <a:bodyPr wrap="square" lIns="0" tIns="0" rIns="0" bIns="0" rtlCol="0" anchor="ctr"/>
           <a:lstStyle/>
           <a:p>
-            <a:pPr indent="0" marL="0">
+            <a:pPr marL="0" indent="0">
               <a:buNone/>
             </a:pPr>
             <a:r>
@@ -9889,7 +9955,7 @@
           <a:bodyPr wrap="square" lIns="0" tIns="0" rIns="0" bIns="0" rtlCol="0" anchor="ctr"/>
           <a:lstStyle/>
           <a:p>
-            <a:pPr indent="0" marL="0">
+            <a:pPr marL="0" indent="0">
               <a:buNone/>
             </a:pPr>
             <a:r>
@@ -9928,7 +9994,7 @@
           <a:bodyPr wrap="square" lIns="0" tIns="0" rIns="0" bIns="0" rtlCol="0" anchor="ctr"/>
           <a:lstStyle/>
           <a:p>
-            <a:pPr indent="0" marL="0">
+            <a:pPr marL="0" indent="0">
               <a:buNone/>
             </a:pPr>
             <a:r>
@@ -9967,7 +10033,7 @@
           <a:bodyPr wrap="square" lIns="0" tIns="0" rIns="0" bIns="0" rtlCol="0" anchor="ctr"/>
           <a:lstStyle/>
           <a:p>
-            <a:pPr indent="0" marL="0">
+            <a:pPr marL="0" indent="0">
               <a:buNone/>
             </a:pPr>
             <a:r>
@@ -10006,7 +10072,7 @@
           <a:bodyPr wrap="square" lIns="0" tIns="0" rIns="0" bIns="0" rtlCol="0" anchor="ctr"/>
           <a:lstStyle/>
           <a:p>
-            <a:pPr indent="0" marL="0">
+            <a:pPr marL="0" indent="0">
               <a:buNone/>
             </a:pPr>
             <a:r>
@@ -10050,6 +10116,13 @@
             <a:prstDash val="solid"/>
           </a:ln>
         </p:spPr>
+        <p:txBody>
+          <a:bodyPr/>
+          <a:lstStyle/>
+          <a:p>
+            <a:endParaRPr lang="ko-KR" altLang="en-US"/>
+          </a:p>
+        </p:txBody>
       </p:sp>
       <p:sp>
         <p:nvSpPr>
@@ -10072,7 +10145,7 @@
           <a:bodyPr wrap="square" lIns="0" tIns="0" rIns="0" bIns="0" rtlCol="0" anchor="ctr"/>
           <a:lstStyle/>
           <a:p>
-            <a:pPr indent="0" marL="0">
+            <a:pPr marL="0" indent="0">
               <a:buNone/>
             </a:pPr>
             <a:r>
@@ -10111,7 +10184,7 @@
           <a:bodyPr wrap="square" lIns="0" tIns="0" rIns="0" bIns="0" rtlCol="0" anchor="ctr"/>
           <a:lstStyle/>
           <a:p>
-            <a:pPr indent="0" marL="0">
+            <a:pPr marL="0" indent="0">
               <a:buNone/>
             </a:pPr>
             <a:r>
@@ -10155,6 +10228,13 @@
             <a:prstDash val="solid"/>
           </a:ln>
         </p:spPr>
+        <p:txBody>
+          <a:bodyPr/>
+          <a:lstStyle/>
+          <a:p>
+            <a:endParaRPr lang="ko-KR" altLang="en-US"/>
+          </a:p>
+        </p:txBody>
       </p:sp>
       <p:sp>
         <p:nvSpPr>
@@ -10177,7 +10257,7 @@
           <a:bodyPr wrap="square" lIns="0" tIns="0" rIns="0" bIns="0" rtlCol="0" anchor="ctr"/>
           <a:lstStyle/>
           <a:p>
-            <a:pPr indent="0" marL="0">
+            <a:pPr marL="0" indent="0">
               <a:buNone/>
             </a:pPr>
             <a:r>
@@ -10216,7 +10296,7 @@
           <a:bodyPr wrap="square" lIns="0" tIns="0" rIns="0" bIns="0" rtlCol="0" anchor="ctr"/>
           <a:lstStyle/>
           <a:p>
-            <a:pPr indent="0" marL="0">
+            <a:pPr marL="0" indent="0">
               <a:buNone/>
             </a:pPr>
             <a:r>
@@ -10260,6 +10340,13 @@
             <a:prstDash val="solid"/>
           </a:ln>
         </p:spPr>
+        <p:txBody>
+          <a:bodyPr/>
+          <a:lstStyle/>
+          <a:p>
+            <a:endParaRPr lang="ko-KR" altLang="en-US"/>
+          </a:p>
+        </p:txBody>
       </p:sp>
       <p:sp>
         <p:nvSpPr>
@@ -10282,7 +10369,7 @@
           <a:bodyPr wrap="square" lIns="0" tIns="0" rIns="0" bIns="0" rtlCol="0" anchor="ctr"/>
           <a:lstStyle/>
           <a:p>
-            <a:pPr indent="0" marL="0">
+            <a:pPr marL="0" indent="0">
               <a:buNone/>
             </a:pPr>
             <a:r>
@@ -10321,7 +10408,7 @@
           <a:bodyPr wrap="square" lIns="0" tIns="0" rIns="0" bIns="0" rtlCol="0" anchor="ctr"/>
           <a:lstStyle/>
           <a:p>
-            <a:pPr indent="0" marL="0">
+            <a:pPr marL="0" indent="0">
               <a:buNone/>
             </a:pPr>
             <a:r>
@@ -10365,6 +10452,13 @@
             <a:prstDash val="solid"/>
           </a:ln>
         </p:spPr>
+        <p:txBody>
+          <a:bodyPr/>
+          <a:lstStyle/>
+          <a:p>
+            <a:endParaRPr lang="ko-KR" altLang="en-US"/>
+          </a:p>
+        </p:txBody>
       </p:sp>
       <p:sp>
         <p:nvSpPr>
@@ -10387,7 +10481,7 @@
           <a:bodyPr wrap="square" lIns="0" tIns="0" rIns="0" bIns="0" rtlCol="0" anchor="ctr"/>
           <a:lstStyle/>
           <a:p>
-            <a:pPr indent="0" marL="0">
+            <a:pPr marL="0" indent="0">
               <a:buNone/>
             </a:pPr>
             <a:r>
@@ -10426,7 +10520,7 @@
           <a:bodyPr wrap="square" lIns="0" tIns="0" rIns="0" bIns="0" rtlCol="0" anchor="ctr"/>
           <a:lstStyle/>
           <a:p>
-            <a:pPr indent="0" marL="0">
+            <a:pPr marL="0" indent="0">
               <a:buNone/>
             </a:pPr>
             <a:r>
@@ -10465,7 +10559,7 @@
           <a:bodyPr wrap="square" lIns="0" tIns="0" rIns="0" bIns="0" rtlCol="0" anchor="ctr"/>
           <a:lstStyle/>
           <a:p>
-            <a:pPr indent="0" marL="0">
+            <a:pPr marL="0" indent="0">
               <a:buNone/>
             </a:pPr>
             <a:r>
@@ -10529,7 +10623,7 @@
           <a:bodyPr wrap="square" lIns="0" tIns="0" rIns="0" bIns="0" rtlCol="0" anchor="ctr"/>
           <a:lstStyle/>
           <a:p>
-            <a:pPr indent="0" marL="0">
+            <a:pPr marL="0" indent="0">
               <a:buNone/>
             </a:pPr>
             <a:r>
@@ -10568,7 +10662,7 @@
           <a:bodyPr wrap="square" lIns="0" tIns="0" rIns="0" bIns="0" rtlCol="0" anchor="ctr"/>
           <a:lstStyle/>
           <a:p>
-            <a:pPr indent="0" marL="0">
+            <a:pPr marL="0" indent="0">
               <a:buNone/>
             </a:pPr>
             <a:r>
@@ -10612,6 +10706,13 @@
             <a:prstDash val="solid"/>
           </a:ln>
         </p:spPr>
+        <p:txBody>
+          <a:bodyPr/>
+          <a:lstStyle/>
+          <a:p>
+            <a:endParaRPr lang="ko-KR" altLang="en-US"/>
+          </a:p>
+        </p:txBody>
       </p:sp>
       <p:sp>
         <p:nvSpPr>
@@ -10634,7 +10735,7 @@
           <a:bodyPr wrap="square" lIns="0" tIns="0" rIns="0" bIns="0" rtlCol="0" anchor="ctr"/>
           <a:lstStyle/>
           <a:p>
-            <a:pPr algn="ctr" indent="0" marL="0">
+            <a:pPr marL="0" indent="0" algn="ctr">
               <a:buNone/>
             </a:pPr>
             <a:r>
@@ -10673,7 +10774,7 @@
           <a:bodyPr wrap="square" lIns="0" tIns="0" rIns="0" bIns="0" rtlCol="0" anchor="ctr"/>
           <a:lstStyle/>
           <a:p>
-            <a:pPr algn="ctr" indent="0" marL="0">
+            <a:pPr marL="0" indent="0" algn="ctr">
               <a:buNone/>
             </a:pPr>
             <a:r>
@@ -10714,6 +10815,13 @@
             <a:tailEnd type="triangle"/>
           </a:ln>
         </p:spPr>
+        <p:txBody>
+          <a:bodyPr/>
+          <a:lstStyle/>
+          <a:p>
+            <a:endParaRPr lang="ko-KR" altLang="en-US"/>
+          </a:p>
+        </p:txBody>
       </p:sp>
       <p:sp>
         <p:nvSpPr>
@@ -10741,6 +10849,13 @@
             <a:prstDash val="solid"/>
           </a:ln>
         </p:spPr>
+        <p:txBody>
+          <a:bodyPr/>
+          <a:lstStyle/>
+          <a:p>
+            <a:endParaRPr lang="ko-KR" altLang="en-US"/>
+          </a:p>
+        </p:txBody>
       </p:sp>
       <p:sp>
         <p:nvSpPr>
@@ -10763,7 +10878,7 @@
           <a:bodyPr wrap="square" lIns="0" tIns="0" rIns="0" bIns="0" rtlCol="0" anchor="ctr"/>
           <a:lstStyle/>
           <a:p>
-            <a:pPr algn="ctr" indent="0" marL="0">
+            <a:pPr marL="0" indent="0" algn="ctr">
               <a:buNone/>
             </a:pPr>
             <a:r>
@@ -10802,7 +10917,7 @@
           <a:bodyPr wrap="square" lIns="0" tIns="0" rIns="0" bIns="0" rtlCol="0" anchor="ctr"/>
           <a:lstStyle/>
           <a:p>
-            <a:pPr algn="ctr" indent="0" marL="0">
+            <a:pPr marL="0" indent="0" algn="ctr">
               <a:buNone/>
             </a:pPr>
             <a:r>
@@ -10843,6 +10958,13 @@
             <a:tailEnd type="triangle"/>
           </a:ln>
         </p:spPr>
+        <p:txBody>
+          <a:bodyPr/>
+          <a:lstStyle/>
+          <a:p>
+            <a:endParaRPr lang="ko-KR" altLang="en-US"/>
+          </a:p>
+        </p:txBody>
       </p:sp>
       <p:sp>
         <p:nvSpPr>
@@ -10870,6 +10992,13 @@
             <a:prstDash val="solid"/>
           </a:ln>
         </p:spPr>
+        <p:txBody>
+          <a:bodyPr/>
+          <a:lstStyle/>
+          <a:p>
+            <a:endParaRPr lang="ko-KR" altLang="en-US"/>
+          </a:p>
+        </p:txBody>
       </p:sp>
       <p:sp>
         <p:nvSpPr>
@@ -10892,7 +11021,7 @@
           <a:bodyPr wrap="square" lIns="0" tIns="0" rIns="0" bIns="0" rtlCol="0" anchor="ctr"/>
           <a:lstStyle/>
           <a:p>
-            <a:pPr algn="ctr" indent="0" marL="0">
+            <a:pPr marL="0" indent="0" algn="ctr">
               <a:buNone/>
             </a:pPr>
             <a:r>
@@ -10931,7 +11060,7 @@
           <a:bodyPr wrap="square" lIns="0" tIns="0" rIns="0" bIns="0" rtlCol="0" anchor="ctr"/>
           <a:lstStyle/>
           <a:p>
-            <a:pPr algn="ctr" indent="0" marL="0">
+            <a:pPr marL="0" indent="0" algn="ctr">
               <a:buNone/>
             </a:pPr>
             <a:r>
@@ -10972,6 +11101,13 @@
             <a:tailEnd type="triangle"/>
           </a:ln>
         </p:spPr>
+        <p:txBody>
+          <a:bodyPr/>
+          <a:lstStyle/>
+          <a:p>
+            <a:endParaRPr lang="ko-KR" altLang="en-US"/>
+          </a:p>
+        </p:txBody>
       </p:sp>
       <p:sp>
         <p:nvSpPr>
@@ -10999,6 +11135,13 @@
             <a:prstDash val="solid"/>
           </a:ln>
         </p:spPr>
+        <p:txBody>
+          <a:bodyPr/>
+          <a:lstStyle/>
+          <a:p>
+            <a:endParaRPr lang="ko-KR" altLang="en-US"/>
+          </a:p>
+        </p:txBody>
       </p:sp>
       <p:sp>
         <p:nvSpPr>
@@ -11021,7 +11164,7 @@
           <a:bodyPr wrap="square" lIns="0" tIns="0" rIns="0" bIns="0" rtlCol="0" anchor="ctr"/>
           <a:lstStyle/>
           <a:p>
-            <a:pPr algn="ctr" indent="0" marL="0">
+            <a:pPr marL="0" indent="0" algn="ctr">
               <a:buNone/>
             </a:pPr>
             <a:r>
@@ -11060,7 +11203,7 @@
           <a:bodyPr wrap="square" lIns="0" tIns="0" rIns="0" bIns="0" rtlCol="0" anchor="ctr"/>
           <a:lstStyle/>
           <a:p>
-            <a:pPr algn="ctr" indent="0" marL="0">
+            <a:pPr marL="0" indent="0" algn="ctr">
               <a:buNone/>
             </a:pPr>
             <a:r>
@@ -11100,6 +11243,13 @@
             <a:prstDash val="solid"/>
           </a:ln>
         </p:spPr>
+        <p:txBody>
+          <a:bodyPr/>
+          <a:lstStyle/>
+          <a:p>
+            <a:endParaRPr lang="ko-KR" altLang="en-US"/>
+          </a:p>
+        </p:txBody>
       </p:sp>
       <p:sp>
         <p:nvSpPr>
@@ -11123,6 +11273,13 @@
             <a:prstDash val="solid"/>
           </a:ln>
         </p:spPr>
+        <p:txBody>
+          <a:bodyPr/>
+          <a:lstStyle/>
+          <a:p>
+            <a:endParaRPr lang="ko-KR" altLang="en-US"/>
+          </a:p>
+        </p:txBody>
       </p:sp>
       <p:sp>
         <p:nvSpPr>
@@ -11147,6 +11304,13 @@
             <a:tailEnd type="triangle"/>
           </a:ln>
         </p:spPr>
+        <p:txBody>
+          <a:bodyPr/>
+          <a:lstStyle/>
+          <a:p>
+            <a:endParaRPr lang="ko-KR" altLang="en-US"/>
+          </a:p>
+        </p:txBody>
       </p:sp>
       <p:sp>
         <p:nvSpPr>
@@ -11174,6 +11338,13 @@
             <a:prstDash val="solid"/>
           </a:ln>
         </p:spPr>
+        <p:txBody>
+          <a:bodyPr/>
+          <a:lstStyle/>
+          <a:p>
+            <a:endParaRPr lang="ko-KR" altLang="en-US"/>
+          </a:p>
+        </p:txBody>
       </p:sp>
       <p:sp>
         <p:nvSpPr>
@@ -11196,7 +11367,7 @@
           <a:bodyPr wrap="square" lIns="0" tIns="0" rIns="0" bIns="0" rtlCol="0" anchor="ctr"/>
           <a:lstStyle/>
           <a:p>
-            <a:pPr algn="ctr" indent="0" marL="0">
+            <a:pPr marL="0" indent="0" algn="ctr">
               <a:buNone/>
             </a:pPr>
             <a:r>
@@ -11235,7 +11406,7 @@
           <a:bodyPr wrap="square" lIns="0" tIns="0" rIns="0" bIns="0" rtlCol="0" anchor="ctr"/>
           <a:lstStyle/>
           <a:p>
-            <a:pPr algn="ctr" indent="0" marL="0">
+            <a:pPr marL="0" indent="0" algn="ctr">
               <a:buNone/>
             </a:pPr>
             <a:r>
@@ -11276,6 +11447,13 @@
             <a:tailEnd type="triangle"/>
           </a:ln>
         </p:spPr>
+        <p:txBody>
+          <a:bodyPr/>
+          <a:lstStyle/>
+          <a:p>
+            <a:endParaRPr lang="ko-KR" altLang="en-US"/>
+          </a:p>
+        </p:txBody>
       </p:sp>
       <p:sp>
         <p:nvSpPr>
@@ -11303,6 +11481,13 @@
             <a:prstDash val="solid"/>
           </a:ln>
         </p:spPr>
+        <p:txBody>
+          <a:bodyPr/>
+          <a:lstStyle/>
+          <a:p>
+            <a:endParaRPr lang="ko-KR" altLang="en-US"/>
+          </a:p>
+        </p:txBody>
       </p:sp>
       <p:sp>
         <p:nvSpPr>
@@ -11325,7 +11510,7 @@
           <a:bodyPr wrap="square" lIns="0" tIns="0" rIns="0" bIns="0" rtlCol="0" anchor="ctr"/>
           <a:lstStyle/>
           <a:p>
-            <a:pPr algn="ctr" indent="0" marL="0">
+            <a:pPr marL="0" indent="0" algn="ctr">
               <a:buNone/>
             </a:pPr>
             <a:r>
@@ -11364,7 +11549,7 @@
           <a:bodyPr wrap="square" lIns="0" tIns="0" rIns="0" bIns="0" rtlCol="0" anchor="ctr"/>
           <a:lstStyle/>
           <a:p>
-            <a:pPr algn="ctr" indent="0" marL="0">
+            <a:pPr marL="0" indent="0" algn="ctr">
               <a:buNone/>
             </a:pPr>
             <a:r>
@@ -11405,6 +11590,13 @@
             <a:tailEnd type="triangle"/>
           </a:ln>
         </p:spPr>
+        <p:txBody>
+          <a:bodyPr/>
+          <a:lstStyle/>
+          <a:p>
+            <a:endParaRPr lang="ko-KR" altLang="en-US"/>
+          </a:p>
+        </p:txBody>
       </p:sp>
       <p:sp>
         <p:nvSpPr>
@@ -11432,6 +11624,13 @@
             <a:prstDash val="solid"/>
           </a:ln>
         </p:spPr>
+        <p:txBody>
+          <a:bodyPr/>
+          <a:lstStyle/>
+          <a:p>
+            <a:endParaRPr lang="ko-KR" altLang="en-US"/>
+          </a:p>
+        </p:txBody>
       </p:sp>
       <p:sp>
         <p:nvSpPr>
@@ -11454,7 +11653,7 @@
           <a:bodyPr wrap="square" lIns="0" tIns="0" rIns="0" bIns="0" rtlCol="0" anchor="ctr"/>
           <a:lstStyle/>
           <a:p>
-            <a:pPr algn="ctr" indent="0" marL="0">
+            <a:pPr marL="0" indent="0" algn="ctr">
               <a:buNone/>
             </a:pPr>
             <a:r>
@@ -11493,7 +11692,7 @@
           <a:bodyPr wrap="square" lIns="0" tIns="0" rIns="0" bIns="0" rtlCol="0" anchor="ctr"/>
           <a:lstStyle/>
           <a:p>
-            <a:pPr algn="ctr" indent="0" marL="0">
+            <a:pPr marL="0" indent="0" algn="ctr">
               <a:buNone/>
             </a:pPr>
             <a:r>
@@ -11534,6 +11733,13 @@
             <a:tailEnd type="triangle"/>
           </a:ln>
         </p:spPr>
+        <p:txBody>
+          <a:bodyPr/>
+          <a:lstStyle/>
+          <a:p>
+            <a:endParaRPr lang="ko-KR" altLang="en-US"/>
+          </a:p>
+        </p:txBody>
       </p:sp>
       <p:sp>
         <p:nvSpPr>
@@ -11561,6 +11767,13 @@
             <a:prstDash val="solid"/>
           </a:ln>
         </p:spPr>
+        <p:txBody>
+          <a:bodyPr/>
+          <a:lstStyle/>
+          <a:p>
+            <a:endParaRPr lang="ko-KR" altLang="en-US"/>
+          </a:p>
+        </p:txBody>
       </p:sp>
       <p:sp>
         <p:nvSpPr>
@@ -11583,7 +11796,7 @@
           <a:bodyPr wrap="square" lIns="0" tIns="0" rIns="0" bIns="0" rtlCol="0" anchor="ctr"/>
           <a:lstStyle/>
           <a:p>
-            <a:pPr algn="ctr" indent="0" marL="0">
+            <a:pPr marL="0" indent="0" algn="ctr">
               <a:buNone/>
             </a:pPr>
             <a:r>
@@ -11622,7 +11835,7 @@
           <a:bodyPr wrap="square" lIns="0" tIns="0" rIns="0" bIns="0" rtlCol="0" anchor="ctr"/>
           <a:lstStyle/>
           <a:p>
-            <a:pPr algn="ctr" indent="0" marL="0">
+            <a:pPr marL="0" indent="0" algn="ctr">
               <a:buNone/>
             </a:pPr>
             <a:r>
@@ -11666,6 +11879,13 @@
             <a:prstDash val="solid"/>
           </a:ln>
         </p:spPr>
+        <p:txBody>
+          <a:bodyPr/>
+          <a:lstStyle/>
+          <a:p>
+            <a:endParaRPr lang="ko-KR" altLang="en-US"/>
+          </a:p>
+        </p:txBody>
       </p:sp>
       <p:sp>
         <p:nvSpPr>
@@ -11688,7 +11908,7 @@
           <a:bodyPr wrap="square" lIns="0" tIns="0" rIns="0" bIns="0" rtlCol="0" anchor="ctr"/>
           <a:lstStyle/>
           <a:p>
-            <a:pPr indent="0" marL="0">
+            <a:pPr marL="0" indent="0">
               <a:buNone/>
             </a:pPr>
             <a:r>
@@ -11727,7 +11947,7 @@
           <a:bodyPr wrap="square" lIns="0" tIns="0" rIns="0" bIns="0" rtlCol="0" anchor="ctr"/>
           <a:lstStyle/>
           <a:p>
-            <a:pPr indent="0" marL="0">
+            <a:pPr marL="0" indent="0">
               <a:buNone/>
             </a:pPr>
             <a:r>
@@ -11766,7 +11986,7 @@
           <a:bodyPr wrap="square" lIns="0" tIns="0" rIns="0" bIns="0" rtlCol="0" anchor="ctr"/>
           <a:lstStyle/>
           <a:p>
-            <a:pPr indent="0" marL="0">
+            <a:pPr marL="0" indent="0">
               <a:buNone/>
             </a:pPr>
             <a:r>
@@ -12085,4 +12305,319 @@
     </a:ext>
   </a:extLst>
 </a:theme>
+</file>
+
+<file path=ppt/theme/theme2.xml><?xml version="1.0" encoding="utf-8"?>
+<a:theme xmlns:a="http://schemas.openxmlformats.org/drawingml/2006/main" name="Office 테마">
+  <a:themeElements>
+    <a:clrScheme name="Office">
+      <a:dk1>
+        <a:sysClr val="windowText" lastClr="000000"/>
+      </a:dk1>
+      <a:lt1>
+        <a:sysClr val="window" lastClr="FFFFFF"/>
+      </a:lt1>
+      <a:dk2>
+        <a:srgbClr val="0E2841"/>
+      </a:dk2>
+      <a:lt2>
+        <a:srgbClr val="E8E8E8"/>
+      </a:lt2>
+      <a:accent1>
+        <a:srgbClr val="156082"/>
+      </a:accent1>
+      <a:accent2>
+        <a:srgbClr val="E97132"/>
+      </a:accent2>
+      <a:accent3>
+        <a:srgbClr val="196B24"/>
+      </a:accent3>
+      <a:accent4>
+        <a:srgbClr val="0F9ED5"/>
+      </a:accent4>
+      <a:accent5>
+        <a:srgbClr val="A02B93"/>
+      </a:accent5>
+      <a:accent6>
+        <a:srgbClr val="4EA72E"/>
+      </a:accent6>
+      <a:hlink>
+        <a:srgbClr val="467886"/>
+      </a:hlink>
+      <a:folHlink>
+        <a:srgbClr val="96607D"/>
+      </a:folHlink>
+    </a:clrScheme>
+    <a:fontScheme name="Office">
+      <a:majorFont>
+        <a:latin typeface="맑은 고딕" panose="02110004020202020204"/>
+        <a:ea typeface=""/>
+        <a:cs typeface=""/>
+        <a:font script="Jpan" typeface="游ゴシック Light"/>
+        <a:font script="Hang" typeface="맑은 고딕"/>
+        <a:font script="Hans" typeface="等线 Light"/>
+        <a:font script="Hant" typeface="新細明體"/>
+        <a:font script="Arab" typeface="Times New Roman"/>
+        <a:font script="Hebr" typeface="Times New Roman"/>
+        <a:font script="Thai" typeface="Angsana New"/>
+        <a:font script="Ethi" typeface="Nyala"/>
+        <a:font script="Beng" typeface="Vrinda"/>
+        <a:font script="Gujr" typeface="Shruti"/>
+        <a:font script="Khmr" typeface="MoolBoran"/>
+        <a:font script="Knda" typeface="Tunga"/>
+        <a:font script="Guru" typeface="Raavi"/>
+        <a:font script="Cans" typeface="Euphemia"/>
+        <a:font script="Cher" typeface="Plantagenet Cherokee"/>
+        <a:font script="Yiii" typeface="Microsoft Yi Baiti"/>
+        <a:font script="Tibt" typeface="Microsoft Himalaya"/>
+        <a:font script="Thaa" typeface="MV Boli"/>
+        <a:font script="Deva" typeface="Mangal"/>
+        <a:font script="Telu" typeface="Gautami"/>
+        <a:font script="Taml" typeface="Latha"/>
+        <a:font script="Syrc" typeface="Estrangelo Edessa"/>
+        <a:font script="Orya" typeface="Kalinga"/>
+        <a:font script="Mlym" typeface="Kartika"/>
+        <a:font script="Laoo" typeface="DokChampa"/>
+        <a:font script="Sinh" typeface="Iskoola Pota"/>
+        <a:font script="Mong" typeface="Mongolian Baiti"/>
+        <a:font script="Viet" typeface="Times New Roman"/>
+        <a:font script="Uigh" typeface="Microsoft Uighur"/>
+        <a:font script="Geor" typeface="Sylfaen"/>
+        <a:font script="Armn" typeface="Arial"/>
+        <a:font script="Bugi" typeface="Leelawadee UI"/>
+        <a:font script="Bopo" typeface="Microsoft JhengHei"/>
+        <a:font script="Java" typeface="Javanese Text"/>
+        <a:font script="Lisu" typeface="Segoe UI"/>
+        <a:font script="Mymr" typeface="Myanmar Text"/>
+        <a:font script="Nkoo" typeface="Ebrima"/>
+        <a:font script="Olck" typeface="Nirmala UI"/>
+        <a:font script="Osma" typeface="Ebrima"/>
+        <a:font script="Phag" typeface="Phagspa"/>
+        <a:font script="Syrn" typeface="Estrangelo Edessa"/>
+        <a:font script="Syrj" typeface="Estrangelo Edessa"/>
+        <a:font script="Syre" typeface="Estrangelo Edessa"/>
+        <a:font script="Sora" typeface="Nirmala UI"/>
+        <a:font script="Tale" typeface="Microsoft Tai Le"/>
+        <a:font script="Talu" typeface="Microsoft New Tai Lue"/>
+        <a:font script="Tfng" typeface="Ebrima"/>
+      </a:majorFont>
+      <a:minorFont>
+        <a:latin typeface="맑은 고딕" panose="02110004020202020204"/>
+        <a:ea typeface=""/>
+        <a:cs typeface=""/>
+        <a:font script="Jpan" typeface="游ゴシック"/>
+        <a:font script="Hang" typeface="맑은 고딕"/>
+        <a:font script="Hans" typeface="等线"/>
+        <a:font script="Hant" typeface="新細明體"/>
+        <a:font script="Arab" typeface="Arial"/>
+        <a:font script="Hebr" typeface="Arial"/>
+        <a:font script="Thai" typeface="Cordia New"/>
+        <a:font script="Ethi" typeface="Nyala"/>
+        <a:font script="Beng" typeface="Vrinda"/>
+        <a:font script="Gujr" typeface="Shruti"/>
+        <a:font script="Khmr" typeface="DaunPenh"/>
+        <a:font script="Knda" typeface="Tunga"/>
+        <a:font script="Guru" typeface="Raavi"/>
+        <a:font script="Cans" typeface="Euphemia"/>
+        <a:font script="Cher" typeface="Plantagenet Cherokee"/>
+        <a:font script="Yiii" typeface="Microsoft Yi Baiti"/>
+        <a:font script="Tibt" typeface="Microsoft Himalaya"/>
+        <a:font script="Thaa" typeface="MV Boli"/>
+        <a:font script="Deva" typeface="Mangal"/>
+        <a:font script="Telu" typeface="Gautami"/>
+        <a:font script="Taml" typeface="Latha"/>
+        <a:font script="Syrc" typeface="Estrangelo Edessa"/>
+        <a:font script="Orya" typeface="Kalinga"/>
+        <a:font script="Mlym" typeface="Kartika"/>
+        <a:font script="Laoo" typeface="DokChampa"/>
+        <a:font script="Sinh" typeface="Iskoola Pota"/>
+        <a:font script="Mong" typeface="Mongolian Baiti"/>
+        <a:font script="Viet" typeface="Arial"/>
+        <a:font script="Uigh" typeface="Microsoft Uighur"/>
+        <a:font script="Geor" typeface="Sylfaen"/>
+        <a:font script="Armn" typeface="Arial"/>
+        <a:font script="Bugi" typeface="Leelawadee UI"/>
+        <a:font script="Bopo" typeface="Microsoft JhengHei"/>
+        <a:font script="Java" typeface="Javanese Text"/>
+        <a:font script="Lisu" typeface="Segoe UI"/>
+        <a:font script="Mymr" typeface="Myanmar Text"/>
+        <a:font script="Nkoo" typeface="Ebrima"/>
+        <a:font script="Olck" typeface="Nirmala UI"/>
+        <a:font script="Osma" typeface="Ebrima"/>
+        <a:font script="Phag" typeface="Phagspa"/>
+        <a:font script="Syrn" typeface="Estrangelo Edessa"/>
+        <a:font script="Syrj" typeface="Estrangelo Edessa"/>
+        <a:font script="Syre" typeface="Estrangelo Edessa"/>
+        <a:font script="Sora" typeface="Nirmala UI"/>
+        <a:font script="Tale" typeface="Microsoft Tai Le"/>
+        <a:font script="Talu" typeface="Microsoft New Tai Lue"/>
+        <a:font script="Tfng" typeface="Ebrima"/>
+      </a:minorFont>
+    </a:fontScheme>
+    <a:fmtScheme name="Office">
+      <a:fillStyleLst>
+        <a:solidFill>
+          <a:schemeClr val="phClr"/>
+        </a:solidFill>
+        <a:gradFill rotWithShape="1">
+          <a:gsLst>
+            <a:gs pos="0">
+              <a:schemeClr val="phClr">
+                <a:lumMod val="110000"/>
+                <a:satMod val="105000"/>
+                <a:tint val="67000"/>
+              </a:schemeClr>
+            </a:gs>
+            <a:gs pos="50000">
+              <a:schemeClr val="phClr">
+                <a:lumMod val="105000"/>
+                <a:satMod val="103000"/>
+                <a:tint val="73000"/>
+              </a:schemeClr>
+            </a:gs>
+            <a:gs pos="100000">
+              <a:schemeClr val="phClr">
+                <a:lumMod val="105000"/>
+                <a:satMod val="109000"/>
+                <a:tint val="81000"/>
+              </a:schemeClr>
+            </a:gs>
+          </a:gsLst>
+          <a:lin ang="5400000" scaled="0"/>
+        </a:gradFill>
+        <a:gradFill rotWithShape="1">
+          <a:gsLst>
+            <a:gs pos="0">
+              <a:schemeClr val="phClr">
+                <a:satMod val="103000"/>
+                <a:lumMod val="102000"/>
+                <a:tint val="94000"/>
+              </a:schemeClr>
+            </a:gs>
+            <a:gs pos="50000">
+              <a:schemeClr val="phClr">
+                <a:satMod val="110000"/>
+                <a:lumMod val="100000"/>
+                <a:shade val="100000"/>
+              </a:schemeClr>
+            </a:gs>
+            <a:gs pos="100000">
+              <a:schemeClr val="phClr">
+                <a:lumMod val="99000"/>
+                <a:satMod val="120000"/>
+                <a:shade val="78000"/>
+              </a:schemeClr>
+            </a:gs>
+          </a:gsLst>
+          <a:lin ang="5400000" scaled="0"/>
+        </a:gradFill>
+      </a:fillStyleLst>
+      <a:lnStyleLst>
+        <a:ln w="12700" cap="flat" cmpd="sng" algn="ctr">
+          <a:solidFill>
+            <a:schemeClr val="phClr"/>
+          </a:solidFill>
+          <a:prstDash val="solid"/>
+          <a:miter lim="800000"/>
+        </a:ln>
+        <a:ln w="19050" cap="flat" cmpd="sng" algn="ctr">
+          <a:solidFill>
+            <a:schemeClr val="phClr"/>
+          </a:solidFill>
+          <a:prstDash val="solid"/>
+          <a:miter lim="800000"/>
+        </a:ln>
+        <a:ln w="25400" cap="flat" cmpd="sng" algn="ctr">
+          <a:solidFill>
+            <a:schemeClr val="phClr"/>
+          </a:solidFill>
+          <a:prstDash val="solid"/>
+          <a:miter lim="800000"/>
+        </a:ln>
+      </a:lnStyleLst>
+      <a:effectStyleLst>
+        <a:effectStyle>
+          <a:effectLst/>
+        </a:effectStyle>
+        <a:effectStyle>
+          <a:effectLst/>
+        </a:effectStyle>
+        <a:effectStyle>
+          <a:effectLst>
+            <a:outerShdw blurRad="57150" dist="19050" dir="5400000" algn="ctr" rotWithShape="0">
+              <a:srgbClr val="000000">
+                <a:alpha val="63000"/>
+              </a:srgbClr>
+            </a:outerShdw>
+          </a:effectLst>
+        </a:effectStyle>
+      </a:effectStyleLst>
+      <a:bgFillStyleLst>
+        <a:solidFill>
+          <a:schemeClr val="phClr"/>
+        </a:solidFill>
+        <a:solidFill>
+          <a:schemeClr val="phClr">
+            <a:tint val="95000"/>
+            <a:satMod val="170000"/>
+          </a:schemeClr>
+        </a:solidFill>
+        <a:gradFill rotWithShape="1">
+          <a:gsLst>
+            <a:gs pos="0">
+              <a:schemeClr val="phClr">
+                <a:tint val="93000"/>
+                <a:satMod val="150000"/>
+                <a:shade val="98000"/>
+                <a:lumMod val="102000"/>
+              </a:schemeClr>
+            </a:gs>
+            <a:gs pos="50000">
+              <a:schemeClr val="phClr">
+                <a:tint val="98000"/>
+                <a:satMod val="130000"/>
+                <a:shade val="90000"/>
+                <a:lumMod val="103000"/>
+              </a:schemeClr>
+            </a:gs>
+            <a:gs pos="100000">
+              <a:schemeClr val="phClr">
+                <a:shade val="63000"/>
+                <a:satMod val="120000"/>
+              </a:schemeClr>
+            </a:gs>
+          </a:gsLst>
+          <a:lin ang="5400000" scaled="0"/>
+        </a:gradFill>
+      </a:bgFillStyleLst>
+    </a:fmtScheme>
+  </a:themeElements>
+  <a:objectDefaults>
+    <a:lnDef>
+      <a:spPr/>
+      <a:bodyPr/>
+      <a:lstStyle/>
+      <a:style>
+        <a:lnRef idx="2">
+          <a:schemeClr val="accent1"/>
+        </a:lnRef>
+        <a:fillRef idx="0">
+          <a:schemeClr val="accent1"/>
+        </a:fillRef>
+        <a:effectRef idx="1">
+          <a:schemeClr val="accent1"/>
+        </a:effectRef>
+        <a:fontRef idx="minor">
+          <a:schemeClr val="tx1"/>
+        </a:fontRef>
+      </a:style>
+    </a:lnDef>
+  </a:objectDefaults>
+  <a:extraClrSchemeLst/>
+  <a:extLst>
+    <a:ext uri="{05A4C25C-085E-4340-85A3-A5531E510DB2}">
+      <thm15:themeFamily xmlns:thm15="http://schemas.microsoft.com/office/thememl/2012/main" name="Office Theme" id="{2E142A2C-CD16-42D6-873A-C26D2A0506FA}" vid="{1BDDFF52-6CD6-40A5-AB3C-68EB2F1E4D0A}"/>
+    </a:ext>
+  </a:extLst>
+</a:theme>
 </file>